--- a/ppts/CHAPTER 3 RAG Part II_Chatting with Your Data.pptx
+++ b/ppts/CHAPTER 3 RAG Part II_Chatting with Your Data.pptx
@@ -5,33 +5,34 @@
     <p:sldMasterId id="2147483660" r:id="rId1"/>
   </p:sldMasterIdLst>
   <p:notesMasterIdLst>
-    <p:notesMasterId r:id="rId23"/>
+    <p:notesMasterId r:id="rId24"/>
   </p:notesMasterIdLst>
   <p:handoutMasterIdLst>
-    <p:handoutMasterId r:id="rId24"/>
+    <p:handoutMasterId r:id="rId25"/>
   </p:handoutMasterIdLst>
   <p:sldIdLst>
     <p:sldId id="256" r:id="rId2"/>
     <p:sldId id="1136" r:id="rId3"/>
     <p:sldId id="1140" r:id="rId4"/>
-    <p:sldId id="1141" r:id="rId5"/>
-    <p:sldId id="1144" r:id="rId6"/>
-    <p:sldId id="1142" r:id="rId7"/>
-    <p:sldId id="1143" r:id="rId8"/>
+    <p:sldId id="1144" r:id="rId5"/>
+    <p:sldId id="1142" r:id="rId6"/>
+    <p:sldId id="1143" r:id="rId7"/>
+    <p:sldId id="1141" r:id="rId8"/>
     <p:sldId id="1150" r:id="rId9"/>
     <p:sldId id="1153" r:id="rId10"/>
     <p:sldId id="1145" r:id="rId11"/>
     <p:sldId id="1147" r:id="rId12"/>
-    <p:sldId id="1149" r:id="rId13"/>
-    <p:sldId id="1148" r:id="rId14"/>
-    <p:sldId id="1146" r:id="rId15"/>
-    <p:sldId id="1154" r:id="rId16"/>
-    <p:sldId id="1151" r:id="rId17"/>
-    <p:sldId id="1152" r:id="rId18"/>
-    <p:sldId id="1155" r:id="rId19"/>
-    <p:sldId id="1156" r:id="rId20"/>
-    <p:sldId id="1157" r:id="rId21"/>
-    <p:sldId id="1158" r:id="rId22"/>
+    <p:sldId id="1159" r:id="rId13"/>
+    <p:sldId id="1149" r:id="rId14"/>
+    <p:sldId id="1148" r:id="rId15"/>
+    <p:sldId id="1146" r:id="rId16"/>
+    <p:sldId id="1154" r:id="rId17"/>
+    <p:sldId id="1151" r:id="rId18"/>
+    <p:sldId id="1152" r:id="rId19"/>
+    <p:sldId id="1155" r:id="rId20"/>
+    <p:sldId id="1156" r:id="rId21"/>
+    <p:sldId id="1157" r:id="rId22"/>
+    <p:sldId id="1158" r:id="rId23"/>
   </p:sldIdLst>
   <p:sldSz cx="12192000" cy="6858000"/>
   <p:notesSz cx="6858000" cy="9144000"/>
@@ -142,14 +143,15 @@
           <p14:sldIdLst>
             <p14:sldId id="1136"/>
             <p14:sldId id="1140"/>
-            <p14:sldId id="1141"/>
             <p14:sldId id="1144"/>
             <p14:sldId id="1142"/>
             <p14:sldId id="1143"/>
+            <p14:sldId id="1141"/>
             <p14:sldId id="1150"/>
             <p14:sldId id="1153"/>
             <p14:sldId id="1145"/>
             <p14:sldId id="1147"/>
+            <p14:sldId id="1159"/>
             <p14:sldId id="1149"/>
             <p14:sldId id="1148"/>
             <p14:sldId id="1146"/>
@@ -284,7 +286,7 @@
                 <a:latin typeface="맑은 고딕" panose="020B0503020000020004" pitchFamily="50" charset="-127"/>
                 <a:ea typeface="맑은 고딕" panose="020B0503020000020004" pitchFamily="50" charset="-127"/>
               </a:rPr>
-              <a:t>2026-08-20</a:t>
+              <a:t>2026-09-30</a:t>
             </a:fld>
             <a:endParaRPr lang="ko-KR" altLang="en-US">
               <a:latin typeface="맑은 고딕" panose="020B0503020000020004" pitchFamily="50" charset="-127"/>
@@ -470,7 +472,7 @@
           <a:p>
             <a:fld id="{43E1C3DD-4A19-441D-907C-380838DB51C4}" type="datetime1">
               <a:rPr lang="ko-KR" altLang="en-US" noProof="0" smtClean="0"/>
-              <a:t>2026-08-20</a:t>
+              <a:t>2026-09-30</a:t>
             </a:fld>
             <a:endParaRPr lang="ko-KR" altLang="en-US" noProof="0"/>
           </a:p>
@@ -1318,7 +1320,7 @@
           <a:p>
             <a:fld id="{990475B5-67CA-4281-BDCA-DA943C3C8EB3}" type="datetime1">
               <a:rPr lang="ko-KR" altLang="en-US" noProof="0" smtClean="0"/>
-              <a:t>2026-08-20</a:t>
+              <a:t>2026-09-30</a:t>
             </a:fld>
             <a:endParaRPr lang="ko-KR" altLang="en-US" noProof="0"/>
           </a:p>
@@ -1972,7 +1974,7 @@
           <a:p>
             <a:fld id="{48A87A34-81AB-432B-8DAE-1953F412C126}" type="datetimeFigureOut">
               <a:rPr lang="en-US" smtClean="0"/>
-              <a:t>8/20/2026</a:t>
+              <a:t>9/30/2026</a:t>
             </a:fld>
             <a:endParaRPr lang="en-US" dirty="0"/>
           </a:p>
@@ -2268,7 +2270,7 @@
           <a:p>
             <a:fld id="{C655C81E-72E7-4D05-94B5-F45B321A525D}" type="datetime1">
               <a:rPr lang="ko-KR" altLang="en-US" noProof="0" smtClean="0"/>
-              <a:t>2026-08-20</a:t>
+              <a:t>2026-09-30</a:t>
             </a:fld>
             <a:endParaRPr lang="ko-KR" altLang="en-US" noProof="0" dirty="0">
               <a:latin typeface="맑은 고딕" panose="020B0503020000020004" pitchFamily="50" charset="-127"/>
@@ -3857,41 +3859,11 @@
                 <a:latin typeface="D2Coding" panose="020B0609020101020101" pitchFamily="49" charset="-127"/>
                 <a:ea typeface="D2Coding" panose="020B0609020101020101" pitchFamily="49" charset="-127"/>
               </a:rPr>
-              <a:t>Multi-Query Retrieval</a:t>
+              <a:t>Rewrite-Retrieve-Read</a:t>
             </a:r>
           </a:p>
         </p:txBody>
       </p:sp>
-      <p:pic>
-        <p:nvPicPr>
-          <p:cNvPr id="8" name="그림 7">
-            <a:extLst>
-              <a:ext uri="{FF2B5EF4-FFF2-40B4-BE49-F238E27FC236}">
-                <a16:creationId xmlns:a16="http://schemas.microsoft.com/office/drawing/2014/main" id="{7F518FF1-57CE-0E5F-CF06-80C8F9A48432}"/>
-              </a:ext>
-            </a:extLst>
-          </p:cNvPr>
-          <p:cNvPicPr>
-            <a:picLocks noChangeAspect="1"/>
-          </p:cNvPicPr>
-          <p:nvPr/>
-        </p:nvPicPr>
-        <p:blipFill>
-          <a:blip r:embed="rId2"/>
-          <a:stretch>
-            <a:fillRect/>
-          </a:stretch>
-        </p:blipFill>
-        <p:spPr>
-          <a:xfrm>
-            <a:off x="1959881" y="2469458"/>
-            <a:ext cx="7773074" cy="3749365"/>
-          </a:xfrm>
-          <a:prstGeom prst="rect">
-            <a:avLst/>
-          </a:prstGeom>
-        </p:spPr>
-      </p:pic>
       <p:sp>
         <p:nvSpPr>
           <p:cNvPr id="10" name="TextBox 9">
@@ -3906,8 +3878,8 @@
         </p:nvSpPr>
         <p:spPr>
           <a:xfrm>
-            <a:off x="104775" y="1301686"/>
-            <a:ext cx="11483286" cy="793166"/>
+            <a:off x="683491" y="1301686"/>
+            <a:ext cx="10904570" cy="3378489"/>
           </a:xfrm>
           <a:prstGeom prst="rect">
             <a:avLst/>
@@ -3920,6 +3892,95 @@
           </a:bodyPr>
           <a:lstStyle/>
           <a:p>
+            <a:pPr marL="285750" lvl="0" indent="-285750">
+              <a:lnSpc>
+                <a:spcPct val="150000"/>
+              </a:lnSpc>
+              <a:buFont typeface="Wingdings" panose="05000000000000000000" pitchFamily="2" charset="2"/>
+              <a:buChar char="v"/>
+            </a:pPr>
+            <a:r>
+              <a:rPr lang="en-US" altLang="ko-KR" sz="1600" dirty="0">
+                <a:latin typeface="D2Coding" panose="020B0609020101020101" pitchFamily="49" charset="-127"/>
+                <a:ea typeface="D2Coding" panose="020B0609020101020101" pitchFamily="49" charset="-127"/>
+              </a:rPr>
+              <a:t>Multi-Query </a:t>
+            </a:r>
+            <a:r>
+              <a:rPr lang="ko-KR" altLang="ko-KR" sz="1600" dirty="0">
+                <a:latin typeface="D2Coding" panose="020B0609020101020101" pitchFamily="49" charset="-127"/>
+                <a:ea typeface="D2Coding" panose="020B0609020101020101" pitchFamily="49" charset="-127"/>
+              </a:rPr>
+              <a:t>사용자가 입력한 원래 질문(</a:t>
+            </a:r>
+            <a:r>
+              <a:rPr lang="ko-KR" altLang="ko-KR" sz="1600" dirty="0" err="1">
+                <a:latin typeface="D2Coding" panose="020B0609020101020101" pitchFamily="49" charset="-127"/>
+                <a:ea typeface="D2Coding" panose="020B0609020101020101" pitchFamily="49" charset="-127"/>
+              </a:rPr>
+              <a:t>Query</a:t>
+            </a:r>
+            <a:r>
+              <a:rPr lang="ko-KR" altLang="ko-KR" sz="1600" dirty="0">
+                <a:latin typeface="D2Coding" panose="020B0609020101020101" pitchFamily="49" charset="-127"/>
+                <a:ea typeface="D2Coding" panose="020B0609020101020101" pitchFamily="49" charset="-127"/>
+              </a:rPr>
+              <a:t>)을 그대로 검색에 쓰지 않고, </a:t>
+            </a:r>
+            <a:r>
+              <a:rPr lang="ko-KR" altLang="ko-KR" sz="1600" dirty="0" err="1">
+                <a:latin typeface="D2Coding" panose="020B0609020101020101" pitchFamily="49" charset="-127"/>
+                <a:ea typeface="D2Coding" panose="020B0609020101020101" pitchFamily="49" charset="-127"/>
+              </a:rPr>
+              <a:t>LLM이</a:t>
+            </a:r>
+            <a:r>
+              <a:rPr lang="ko-KR" altLang="ko-KR" sz="1600" dirty="0">
+                <a:latin typeface="D2Coding" panose="020B0609020101020101" pitchFamily="49" charset="-127"/>
+                <a:ea typeface="D2Coding" panose="020B0609020101020101" pitchFamily="49" charset="-127"/>
+              </a:rPr>
+              <a:t> 1차, 2차 등 여러 단계에 걸쳐 검색에 더 적합한 형태로 변환된 쿼리로 벡터스토어에서 관련 문서 조각(</a:t>
+            </a:r>
+            <a:r>
+              <a:rPr lang="ko-KR" altLang="ko-KR" sz="1600" dirty="0" err="1">
+                <a:latin typeface="D2Coding" panose="020B0609020101020101" pitchFamily="49" charset="-127"/>
+                <a:ea typeface="D2Coding" panose="020B0609020101020101" pitchFamily="49" charset="-127"/>
+              </a:rPr>
+              <a:t>chunk</a:t>
+            </a:r>
+            <a:r>
+              <a:rPr lang="ko-KR" altLang="ko-KR" sz="1600" dirty="0">
+                <a:latin typeface="D2Coding" panose="020B0609020101020101" pitchFamily="49" charset="-127"/>
+                <a:ea typeface="D2Coding" panose="020B0609020101020101" pitchFamily="49" charset="-127"/>
+              </a:rPr>
+              <a:t>)을 찾아</a:t>
+            </a:r>
+            <a:r>
+              <a:rPr lang="ko-KR" altLang="en-US" sz="1600" dirty="0">
+                <a:latin typeface="D2Coding" panose="020B0609020101020101" pitchFamily="49" charset="-127"/>
+                <a:ea typeface="D2Coding" panose="020B0609020101020101" pitchFamily="49" charset="-127"/>
+              </a:rPr>
+              <a:t>오기</a:t>
+            </a:r>
+            <a:endParaRPr lang="en-US" altLang="ko-KR" sz="1600" dirty="0">
+              <a:latin typeface="D2Coding" panose="020B0609020101020101" pitchFamily="49" charset="-127"/>
+              <a:ea typeface="D2Coding" panose="020B0609020101020101" pitchFamily="49" charset="-127"/>
+            </a:endParaRPr>
+          </a:p>
+          <a:p>
+            <a:pPr marL="285750" lvl="0" indent="-285750">
+              <a:lnSpc>
+                <a:spcPct val="150000"/>
+              </a:lnSpc>
+              <a:buFont typeface="Wingdings" panose="05000000000000000000" pitchFamily="2" charset="2"/>
+              <a:buChar char="v"/>
+            </a:pPr>
+            <a:endParaRPr lang="ko-KR" altLang="ko-KR" sz="1600" dirty="0">
+              <a:latin typeface="D2Coding" panose="020B0609020101020101" pitchFamily="49" charset="-127"/>
+              <a:ea typeface="D2Coding" panose="020B0609020101020101" pitchFamily="49" charset="-127"/>
+            </a:endParaRPr>
+          </a:p>
+          <a:p>
             <a:pPr marL="742950" lvl="1" indent="-285750">
               <a:lnSpc>
                 <a:spcPct val="150000"/>
@@ -3928,75 +3989,150 @@
               <a:buChar char="v"/>
             </a:pPr>
             <a:r>
-              <a:rPr lang="en-US" altLang="ko-KR" sz="1600" dirty="0">
-                <a:latin typeface="D2Coding" panose="020B0609020101020101" pitchFamily="49" charset="-127"/>
-                <a:ea typeface="D2Coding" panose="020B0609020101020101" pitchFamily="49" charset="-127"/>
-              </a:rPr>
-              <a:t>Multi-Query Retrieval</a:t>
-            </a:r>
-            <a:r>
-              <a:rPr lang="ko-KR" altLang="en-US" sz="1600" dirty="0">
-                <a:latin typeface="D2Coding" panose="020B0609020101020101" pitchFamily="49" charset="-127"/>
-                <a:ea typeface="D2Coding" panose="020B0609020101020101" pitchFamily="49" charset="-127"/>
-              </a:rPr>
-              <a:t>는</a:t>
-            </a:r>
-            <a:r>
-              <a:rPr lang="en-US" altLang="ko-KR" sz="1600" dirty="0">
-                <a:latin typeface="D2Coding" panose="020B0609020101020101" pitchFamily="49" charset="-127"/>
-                <a:ea typeface="D2Coding" panose="020B0609020101020101" pitchFamily="49" charset="-127"/>
-              </a:rPr>
-              <a:t> </a:t>
-            </a:r>
-            <a:r>
-              <a:rPr lang="ko-KR" altLang="en-US" sz="1600" dirty="0">
-                <a:latin typeface="D2Coding" panose="020B0609020101020101" pitchFamily="49" charset="-127"/>
-                <a:ea typeface="D2Coding" panose="020B0609020101020101" pitchFamily="49" charset="-127"/>
-              </a:rPr>
-              <a:t>사용자의 </a:t>
-            </a:r>
-            <a:r>
-              <a:rPr lang="en-US" altLang="ko-KR" sz="1600" dirty="0">
-                <a:latin typeface="D2Coding" panose="020B0609020101020101" pitchFamily="49" charset="-127"/>
-                <a:ea typeface="D2Coding" panose="020B0609020101020101" pitchFamily="49" charset="-127"/>
-              </a:rPr>
-              <a:t>Query</a:t>
-            </a:r>
-            <a:r>
-              <a:rPr lang="ko-KR" altLang="en-US" sz="1600" dirty="0">
-                <a:latin typeface="D2Coding" panose="020B0609020101020101" pitchFamily="49" charset="-127"/>
-                <a:ea typeface="D2Coding" panose="020B0609020101020101" pitchFamily="49" charset="-127"/>
-              </a:rPr>
-              <a:t>를 </a:t>
-            </a:r>
-            <a:r>
-              <a:rPr lang="en-US" altLang="ko-KR" sz="1600" dirty="0">
-                <a:latin typeface="D2Coding" panose="020B0609020101020101" pitchFamily="49" charset="-127"/>
-                <a:ea typeface="D2Coding" panose="020B0609020101020101" pitchFamily="49" charset="-127"/>
-              </a:rPr>
-              <a:t>LLM</a:t>
-            </a:r>
-            <a:r>
-              <a:rPr lang="ko-KR" altLang="en-US" sz="1600" dirty="0">
-                <a:latin typeface="D2Coding" panose="020B0609020101020101" pitchFamily="49" charset="-127"/>
-                <a:ea typeface="D2Coding" panose="020B0609020101020101" pitchFamily="49" charset="-127"/>
-              </a:rPr>
-              <a:t>이 질문을 </a:t>
-            </a:r>
-            <a:r>
-              <a:rPr lang="en-US" altLang="ko-KR" sz="1600" dirty="0">
-                <a:latin typeface="D2Coding" panose="020B0609020101020101" pitchFamily="49" charset="-127"/>
-                <a:ea typeface="D2Coding" panose="020B0609020101020101" pitchFamily="49" charset="-127"/>
-              </a:rPr>
-              <a:t>3~4</a:t>
-            </a:r>
-            <a:r>
-              <a:rPr lang="ko-KR" altLang="en-US" sz="1600" dirty="0">
-                <a:latin typeface="D2Coding" panose="020B0609020101020101" pitchFamily="49" charset="-127"/>
-                <a:ea typeface="D2Coding" panose="020B0609020101020101" pitchFamily="49" charset="-127"/>
-              </a:rPr>
-              <a:t>개의 다른 표현으로 복제한 후 벡터스토어에서 조각 문서를 찾아 내기</a:t>
-            </a:r>
+              <a:rPr lang="ko-KR" altLang="ko-KR" sz="1600" dirty="0" err="1">
+                <a:latin typeface="D2Coding" panose="020B0609020101020101" pitchFamily="49" charset="-127"/>
+                <a:ea typeface="D2Coding" panose="020B0609020101020101" pitchFamily="49" charset="-127"/>
+              </a:rPr>
+              <a:t>Rewrite</a:t>
+            </a:r>
+            <a:r>
+              <a:rPr lang="ko-KR" altLang="ko-KR" sz="1600" dirty="0">
+                <a:latin typeface="D2Coding" panose="020B0609020101020101" pitchFamily="49" charset="-127"/>
+                <a:ea typeface="D2Coding" panose="020B0609020101020101" pitchFamily="49" charset="-127"/>
+              </a:rPr>
+              <a:t>: </a:t>
+            </a:r>
+            <a:r>
+              <a:rPr lang="ko-KR" altLang="ko-KR" sz="1600" dirty="0" err="1">
+                <a:latin typeface="D2Coding" panose="020B0609020101020101" pitchFamily="49" charset="-127"/>
+                <a:ea typeface="D2Coding" panose="020B0609020101020101" pitchFamily="49" charset="-127"/>
+              </a:rPr>
+              <a:t>LLM이</a:t>
+            </a:r>
+            <a:r>
+              <a:rPr lang="ko-KR" altLang="ko-KR" sz="1600" dirty="0">
+                <a:latin typeface="D2Coding" panose="020B0609020101020101" pitchFamily="49" charset="-127"/>
+                <a:ea typeface="D2Coding" panose="020B0609020101020101" pitchFamily="49" charset="-127"/>
+              </a:rPr>
+              <a:t> 사용자 질문을 재작성</a:t>
+            </a:r>
+            <a:endParaRPr lang="en-US" altLang="ko-KR" sz="1600" dirty="0">
+              <a:latin typeface="D2Coding" panose="020B0609020101020101" pitchFamily="49" charset="-127"/>
+              <a:ea typeface="D2Coding" panose="020B0609020101020101" pitchFamily="49" charset="-127"/>
+            </a:endParaRPr>
+          </a:p>
+          <a:p>
+            <a:pPr marL="742950" lvl="1" indent="-285750">
+              <a:lnSpc>
+                <a:spcPct val="150000"/>
+              </a:lnSpc>
+              <a:buFont typeface="Wingdings" panose="05000000000000000000" pitchFamily="2" charset="2"/>
+              <a:buChar char="v"/>
+            </a:pPr>
+            <a:endParaRPr lang="ko-KR" altLang="ko-KR" sz="1600" dirty="0">
+              <a:latin typeface="D2Coding" panose="020B0609020101020101" pitchFamily="49" charset="-127"/>
+              <a:ea typeface="D2Coding" panose="020B0609020101020101" pitchFamily="49" charset="-127"/>
+            </a:endParaRPr>
+          </a:p>
+          <a:p>
+            <a:pPr marL="742950" lvl="1" indent="-285750">
+              <a:lnSpc>
+                <a:spcPct val="150000"/>
+              </a:lnSpc>
+              <a:buFont typeface="Wingdings" panose="05000000000000000000" pitchFamily="2" charset="2"/>
+              <a:buChar char="v"/>
+            </a:pPr>
+            <a:r>
+              <a:rPr lang="ko-KR" altLang="ko-KR" sz="1600" dirty="0" err="1">
+                <a:latin typeface="D2Coding" panose="020B0609020101020101" pitchFamily="49" charset="-127"/>
+                <a:ea typeface="D2Coding" panose="020B0609020101020101" pitchFamily="49" charset="-127"/>
+              </a:rPr>
+              <a:t>Retrieve</a:t>
+            </a:r>
+            <a:r>
+              <a:rPr lang="ko-KR" altLang="ko-KR" sz="1600" dirty="0">
+                <a:latin typeface="D2Coding" panose="020B0609020101020101" pitchFamily="49" charset="-127"/>
+                <a:ea typeface="D2Coding" panose="020B0609020101020101" pitchFamily="49" charset="-127"/>
+              </a:rPr>
+              <a:t>: </a:t>
+            </a:r>
+            <a:r>
+              <a:rPr lang="ko-KR" altLang="ko-KR" sz="1600" dirty="0" err="1">
+                <a:latin typeface="D2Coding" panose="020B0609020101020101" pitchFamily="49" charset="-127"/>
+                <a:ea typeface="D2Coding" panose="020B0609020101020101" pitchFamily="49" charset="-127"/>
+              </a:rPr>
+              <a:t>재작성된</a:t>
+            </a:r>
+            <a:r>
+              <a:rPr lang="ko-KR" altLang="ko-KR" sz="1600" dirty="0">
+                <a:latin typeface="D2Coding" panose="020B0609020101020101" pitchFamily="49" charset="-127"/>
+                <a:ea typeface="D2Coding" panose="020B0609020101020101" pitchFamily="49" charset="-127"/>
+              </a:rPr>
+              <a:t> 쿼리로 벡터스토어에서 관련 문서 검색</a:t>
+            </a:r>
+            <a:endParaRPr lang="en-US" altLang="ko-KR" sz="1600" dirty="0">
+              <a:latin typeface="D2Coding" panose="020B0609020101020101" pitchFamily="49" charset="-127"/>
+              <a:ea typeface="D2Coding" panose="020B0609020101020101" pitchFamily="49" charset="-127"/>
+            </a:endParaRPr>
+          </a:p>
+          <a:p>
+            <a:pPr marL="742950" lvl="1" indent="-285750">
+              <a:lnSpc>
+                <a:spcPct val="150000"/>
+              </a:lnSpc>
+              <a:buFont typeface="Wingdings" panose="05000000000000000000" pitchFamily="2" charset="2"/>
+              <a:buChar char="v"/>
+            </a:pPr>
+            <a:endParaRPr lang="ko-KR" altLang="ko-KR" sz="1600" dirty="0">
+              <a:latin typeface="D2Coding" panose="020B0609020101020101" pitchFamily="49" charset="-127"/>
+              <a:ea typeface="D2Coding" panose="020B0609020101020101" pitchFamily="49" charset="-127"/>
+            </a:endParaRPr>
+          </a:p>
+          <a:p>
+            <a:pPr marL="742950" lvl="1" indent="-285750">
+              <a:lnSpc>
+                <a:spcPct val="150000"/>
+              </a:lnSpc>
+              <a:buFont typeface="Wingdings" panose="05000000000000000000" pitchFamily="2" charset="2"/>
+              <a:buChar char="v"/>
+            </a:pPr>
+            <a:r>
+              <a:rPr lang="ko-KR" altLang="ko-KR" sz="1600" dirty="0" err="1">
+                <a:latin typeface="D2Coding" panose="020B0609020101020101" pitchFamily="49" charset="-127"/>
+                <a:ea typeface="D2Coding" panose="020B0609020101020101" pitchFamily="49" charset="-127"/>
+              </a:rPr>
+              <a:t>Read</a:t>
+            </a:r>
+            <a:r>
+              <a:rPr lang="ko-KR" altLang="ko-KR" sz="1600" dirty="0">
+                <a:latin typeface="D2Coding" panose="020B0609020101020101" pitchFamily="49" charset="-127"/>
+                <a:ea typeface="D2Coding" panose="020B0609020101020101" pitchFamily="49" charset="-127"/>
+              </a:rPr>
+              <a:t>: 검색된 문서를 바탕으로 </a:t>
+            </a:r>
+            <a:r>
+              <a:rPr lang="ko-KR" altLang="ko-KR" sz="1600" dirty="0" err="1">
+                <a:latin typeface="D2Coding" panose="020B0609020101020101" pitchFamily="49" charset="-127"/>
+                <a:ea typeface="D2Coding" panose="020B0609020101020101" pitchFamily="49" charset="-127"/>
+              </a:rPr>
+              <a:t>LLM이</a:t>
+            </a:r>
+            <a:r>
+              <a:rPr lang="ko-KR" altLang="ko-KR" sz="1600" dirty="0">
+                <a:latin typeface="D2Coding" panose="020B0609020101020101" pitchFamily="49" charset="-127"/>
+                <a:ea typeface="D2Coding" panose="020B0609020101020101" pitchFamily="49" charset="-127"/>
+              </a:rPr>
+              <a:t> 답변 생성</a:t>
+            </a:r>
+          </a:p>
+          <a:p>
+            <a:pPr marL="742950" lvl="1" indent="-285750">
+              <a:lnSpc>
+                <a:spcPct val="150000"/>
+              </a:lnSpc>
+              <a:buFont typeface="Wingdings" panose="05000000000000000000" pitchFamily="2" charset="2"/>
+              <a:buChar char="v"/>
+            </a:pPr>
             <a:endParaRPr lang="en-US" altLang="ko-KR" sz="1600" dirty="0">
               <a:latin typeface="D2Coding" panose="020B0609020101020101" pitchFamily="49" charset="-127"/>
               <a:ea typeface="D2Coding" panose="020B0609020101020101" pitchFamily="49" charset="-127"/>
@@ -4137,6 +4273,88 @@
           </a:p>
         </p:txBody>
       </p:sp>
+      <p:cxnSp>
+        <p:nvCxnSpPr>
+          <p:cNvPr id="6" name="직선 화살표 연결선 5">
+            <a:extLst>
+              <a:ext uri="{FF2B5EF4-FFF2-40B4-BE49-F238E27FC236}">
+                <a16:creationId xmlns:a16="http://schemas.microsoft.com/office/drawing/2014/main" id="{2604CC06-3756-0A75-0E7B-875D05CAC3CD}"/>
+              </a:ext>
+            </a:extLst>
+          </p:cNvPr>
+          <p:cNvCxnSpPr>
+            <a:cxnSpLocks/>
+          </p:cNvCxnSpPr>
+          <p:nvPr/>
+        </p:nvCxnSpPr>
+        <p:spPr>
+          <a:xfrm>
+            <a:off x="1805709" y="2826327"/>
+            <a:ext cx="0" cy="360218"/>
+          </a:xfrm>
+          <a:prstGeom prst="straightConnector1">
+            <a:avLst/>
+          </a:prstGeom>
+          <a:ln>
+            <a:tailEnd type="triangle"/>
+          </a:ln>
+        </p:spPr>
+        <p:style>
+          <a:lnRef idx="1">
+            <a:schemeClr val="dk1"/>
+          </a:lnRef>
+          <a:fillRef idx="0">
+            <a:schemeClr val="dk1"/>
+          </a:fillRef>
+          <a:effectRef idx="0">
+            <a:schemeClr val="dk1"/>
+          </a:effectRef>
+          <a:fontRef idx="minor">
+            <a:schemeClr val="tx1"/>
+          </a:fontRef>
+        </p:style>
+      </p:cxnSp>
+      <p:cxnSp>
+        <p:nvCxnSpPr>
+          <p:cNvPr id="7" name="직선 화살표 연결선 6">
+            <a:extLst>
+              <a:ext uri="{FF2B5EF4-FFF2-40B4-BE49-F238E27FC236}">
+                <a16:creationId xmlns:a16="http://schemas.microsoft.com/office/drawing/2014/main" id="{74A3BC26-3EBC-86D9-86EE-BFB68D8A11B1}"/>
+              </a:ext>
+            </a:extLst>
+          </p:cNvPr>
+          <p:cNvCxnSpPr>
+            <a:cxnSpLocks/>
+          </p:cNvCxnSpPr>
+          <p:nvPr/>
+        </p:nvCxnSpPr>
+        <p:spPr>
+          <a:xfrm>
+            <a:off x="1805709" y="3634509"/>
+            <a:ext cx="0" cy="360218"/>
+          </a:xfrm>
+          <a:prstGeom prst="straightConnector1">
+            <a:avLst/>
+          </a:prstGeom>
+          <a:ln>
+            <a:tailEnd type="triangle"/>
+          </a:ln>
+        </p:spPr>
+        <p:style>
+          <a:lnRef idx="1">
+            <a:schemeClr val="dk1"/>
+          </a:lnRef>
+          <a:fillRef idx="0">
+            <a:schemeClr val="dk1"/>
+          </a:fillRef>
+          <a:effectRef idx="0">
+            <a:schemeClr val="dk1"/>
+          </a:effectRef>
+          <a:fontRef idx="minor">
+            <a:schemeClr val="tx1"/>
+          </a:fontRef>
+        </p:style>
+      </p:cxnSp>
     </p:spTree>
     <p:extLst>
       <p:ext uri="{BB962C8B-B14F-4D97-AF65-F5344CB8AC3E}">
@@ -4151,6 +4369,431 @@
 </file>
 
 <file path=ppt/slides/slide12.xml><?xml version="1.0" encoding="utf-8"?>
+<p:sld xmlns:a="http://schemas.openxmlformats.org/drawingml/2006/main" xmlns:r="http://schemas.openxmlformats.org/officeDocument/2006/relationships" xmlns:p="http://schemas.openxmlformats.org/presentationml/2006/main">
+  <p:cSld>
+    <p:spTree>
+      <p:nvGrpSpPr>
+        <p:cNvPr id="1" name="">
+          <a:extLst>
+            <a:ext uri="{FF2B5EF4-FFF2-40B4-BE49-F238E27FC236}">
+              <a16:creationId xmlns:a16="http://schemas.microsoft.com/office/drawing/2014/main" id="{636338F9-B71E-6FC8-ED80-4F6B58A7CD91}"/>
+            </a:ext>
+          </a:extLst>
+        </p:cNvPr>
+        <p:cNvGrpSpPr/>
+        <p:nvPr/>
+      </p:nvGrpSpPr>
+      <p:grpSpPr>
+        <a:xfrm>
+          <a:off x="0" y="0"/>
+          <a:ext cx="0" cy="0"/>
+          <a:chOff x="0" y="0"/>
+          <a:chExt cx="0" cy="0"/>
+        </a:xfrm>
+      </p:grpSpPr>
+      <p:sp>
+        <p:nvSpPr>
+          <p:cNvPr id="3" name="제목 1">
+            <a:extLst>
+              <a:ext uri="{FF2B5EF4-FFF2-40B4-BE49-F238E27FC236}">
+                <a16:creationId xmlns:a16="http://schemas.microsoft.com/office/drawing/2014/main" id="{20E64DC4-7DDB-5AC2-6FA0-FEE69261CA73}"/>
+              </a:ext>
+            </a:extLst>
+          </p:cNvPr>
+          <p:cNvSpPr txBox="1">
+            <a:spLocks/>
+          </p:cNvSpPr>
+          <p:nvPr/>
+        </p:nvSpPr>
+        <p:spPr>
+          <a:xfrm>
+            <a:off x="475645" y="481983"/>
+            <a:ext cx="10353762" cy="766439"/>
+          </a:xfrm>
+          <a:prstGeom prst="rect">
+            <a:avLst/>
+          </a:prstGeom>
+        </p:spPr>
+        <p:txBody>
+          <a:bodyPr vert="horz" lIns="91440" tIns="45720" rIns="91440" bIns="45720" rtlCol="0" anchor="ctr">
+            <a:normAutofit/>
+          </a:bodyPr>
+          <a:lstStyle>
+            <a:lvl1pPr algn="ctr" defTabSz="914400" rtl="0" eaLnBrk="1" latinLnBrk="1" hangingPunct="1">
+              <a:lnSpc>
+                <a:spcPct val="90000"/>
+              </a:lnSpc>
+              <a:spcBef>
+                <a:spcPct val="0"/>
+              </a:spcBef>
+              <a:buNone/>
+              <a:defRPr sz="3200" kern="1200" cap="all" baseline="0">
+                <a:solidFill>
+                  <a:schemeClr val="tx1"/>
+                </a:solidFill>
+                <a:effectLst/>
+                <a:latin typeface="Batang" panose="02030600000101010101" pitchFamily="18" charset="-127"/>
+                <a:ea typeface="Batang" panose="02030600000101010101" pitchFamily="18" charset="-127"/>
+                <a:cs typeface="+mj-cs"/>
+              </a:defRPr>
+            </a:lvl1pPr>
+          </a:lstStyle>
+          <a:p>
+            <a:pPr algn="l"/>
+            <a:r>
+              <a:rPr lang="en-US" altLang="ko-KR" sz="2800" cap="none" dirty="0">
+                <a:solidFill>
+                  <a:schemeClr val="bg2">
+                    <a:lumMod val="25000"/>
+                  </a:schemeClr>
+                </a:solidFill>
+                <a:latin typeface="D2Coding" panose="020B0609020101020101" pitchFamily="49" charset="-127"/>
+                <a:ea typeface="D2Coding" panose="020B0609020101020101" pitchFamily="49" charset="-127"/>
+                <a:cs typeface="Segoe UI Light" panose="020B0502040204020203" pitchFamily="34" charset="0"/>
+              </a:rPr>
+              <a:t>Query Transformation </a:t>
+            </a:r>
+            <a:endParaRPr lang="ko-KR" altLang="en-US" sz="2800" cap="none" dirty="0">
+              <a:solidFill>
+                <a:schemeClr val="bg2">
+                  <a:lumMod val="25000"/>
+                </a:schemeClr>
+              </a:solidFill>
+              <a:latin typeface="D2Coding" panose="020B0609020101020101" pitchFamily="49" charset="-127"/>
+              <a:ea typeface="D2Coding" panose="020B0609020101020101" pitchFamily="49" charset="-127"/>
+              <a:cs typeface="Segoe UI Light" panose="020B0502040204020203" pitchFamily="34" charset="0"/>
+            </a:endParaRPr>
+          </a:p>
+        </p:txBody>
+      </p:sp>
+      <p:sp>
+        <p:nvSpPr>
+          <p:cNvPr id="5" name="TextBox 4">
+            <a:extLst>
+              <a:ext uri="{FF2B5EF4-FFF2-40B4-BE49-F238E27FC236}">
+                <a16:creationId xmlns:a16="http://schemas.microsoft.com/office/drawing/2014/main" id="{F6390AC2-ADED-B65F-8CEA-8B11F7AADE34}"/>
+              </a:ext>
+            </a:extLst>
+          </p:cNvPr>
+          <p:cNvSpPr txBox="1"/>
+          <p:nvPr/>
+        </p:nvSpPr>
+        <p:spPr>
+          <a:xfrm>
+            <a:off x="8077805" y="709111"/>
+            <a:ext cx="3600450" cy="369332"/>
+          </a:xfrm>
+          <a:prstGeom prst="rect">
+            <a:avLst/>
+          </a:prstGeom>
+          <a:noFill/>
+        </p:spPr>
+        <p:txBody>
+          <a:bodyPr wrap="square">
+            <a:spAutoFit/>
+          </a:bodyPr>
+          <a:lstStyle/>
+          <a:p>
+            <a:pPr algn="r"/>
+            <a:r>
+              <a:rPr lang="en-US" altLang="ko-KR" b="1" dirty="0">
+                <a:latin typeface="D2Coding" panose="020B0609020101020101" pitchFamily="49" charset="-127"/>
+                <a:ea typeface="D2Coding" panose="020B0609020101020101" pitchFamily="49" charset="-127"/>
+              </a:rPr>
+              <a:t>Multi-Query Retrieval</a:t>
+            </a:r>
+          </a:p>
+        </p:txBody>
+      </p:sp>
+      <p:pic>
+        <p:nvPicPr>
+          <p:cNvPr id="8" name="그림 7">
+            <a:extLst>
+              <a:ext uri="{FF2B5EF4-FFF2-40B4-BE49-F238E27FC236}">
+                <a16:creationId xmlns:a16="http://schemas.microsoft.com/office/drawing/2014/main" id="{E22D524D-4E95-299E-EB3B-80CC993EBE9D}"/>
+              </a:ext>
+            </a:extLst>
+          </p:cNvPr>
+          <p:cNvPicPr>
+            <a:picLocks noChangeAspect="1"/>
+          </p:cNvPicPr>
+          <p:nvPr/>
+        </p:nvPicPr>
+        <p:blipFill>
+          <a:blip r:embed="rId2"/>
+          <a:stretch>
+            <a:fillRect/>
+          </a:stretch>
+        </p:blipFill>
+        <p:spPr>
+          <a:xfrm>
+            <a:off x="1959881" y="2469458"/>
+            <a:ext cx="7773074" cy="3749365"/>
+          </a:xfrm>
+          <a:prstGeom prst="rect">
+            <a:avLst/>
+          </a:prstGeom>
+        </p:spPr>
+      </p:pic>
+      <p:sp>
+        <p:nvSpPr>
+          <p:cNvPr id="10" name="TextBox 9">
+            <a:extLst>
+              <a:ext uri="{FF2B5EF4-FFF2-40B4-BE49-F238E27FC236}">
+                <a16:creationId xmlns:a16="http://schemas.microsoft.com/office/drawing/2014/main" id="{E199CCD7-FDDB-56B8-0D57-C45233F6FD5F}"/>
+              </a:ext>
+            </a:extLst>
+          </p:cNvPr>
+          <p:cNvSpPr txBox="1"/>
+          <p:nvPr/>
+        </p:nvSpPr>
+        <p:spPr>
+          <a:xfrm>
+            <a:off x="104775" y="1301686"/>
+            <a:ext cx="11483286" cy="793166"/>
+          </a:xfrm>
+          <a:prstGeom prst="rect">
+            <a:avLst/>
+          </a:prstGeom>
+          <a:noFill/>
+        </p:spPr>
+        <p:txBody>
+          <a:bodyPr wrap="square">
+            <a:spAutoFit/>
+          </a:bodyPr>
+          <a:lstStyle/>
+          <a:p>
+            <a:pPr marL="742950" lvl="1" indent="-285750">
+              <a:lnSpc>
+                <a:spcPct val="150000"/>
+              </a:lnSpc>
+              <a:buFont typeface="Wingdings" panose="05000000000000000000" pitchFamily="2" charset="2"/>
+              <a:buChar char="v"/>
+            </a:pPr>
+            <a:r>
+              <a:rPr lang="en-US" altLang="ko-KR" sz="1600" dirty="0">
+                <a:latin typeface="D2Coding" panose="020B0609020101020101" pitchFamily="49" charset="-127"/>
+                <a:ea typeface="D2Coding" panose="020B0609020101020101" pitchFamily="49" charset="-127"/>
+              </a:rPr>
+              <a:t>Multi-Query Retrieval</a:t>
+            </a:r>
+            <a:r>
+              <a:rPr lang="ko-KR" altLang="en-US" sz="1600" dirty="0">
+                <a:latin typeface="D2Coding" panose="020B0609020101020101" pitchFamily="49" charset="-127"/>
+                <a:ea typeface="D2Coding" panose="020B0609020101020101" pitchFamily="49" charset="-127"/>
+              </a:rPr>
+              <a:t>는</a:t>
+            </a:r>
+            <a:r>
+              <a:rPr lang="en-US" altLang="ko-KR" sz="1600" dirty="0">
+                <a:latin typeface="D2Coding" panose="020B0609020101020101" pitchFamily="49" charset="-127"/>
+                <a:ea typeface="D2Coding" panose="020B0609020101020101" pitchFamily="49" charset="-127"/>
+              </a:rPr>
+              <a:t> </a:t>
+            </a:r>
+            <a:r>
+              <a:rPr lang="ko-KR" altLang="en-US" sz="1600" dirty="0">
+                <a:latin typeface="D2Coding" panose="020B0609020101020101" pitchFamily="49" charset="-127"/>
+                <a:ea typeface="D2Coding" panose="020B0609020101020101" pitchFamily="49" charset="-127"/>
+              </a:rPr>
+              <a:t>사용자의 </a:t>
+            </a:r>
+            <a:r>
+              <a:rPr lang="en-US" altLang="ko-KR" sz="1600" dirty="0">
+                <a:latin typeface="D2Coding" panose="020B0609020101020101" pitchFamily="49" charset="-127"/>
+                <a:ea typeface="D2Coding" panose="020B0609020101020101" pitchFamily="49" charset="-127"/>
+              </a:rPr>
+              <a:t>Query</a:t>
+            </a:r>
+            <a:r>
+              <a:rPr lang="ko-KR" altLang="en-US" sz="1600" dirty="0">
+                <a:latin typeface="D2Coding" panose="020B0609020101020101" pitchFamily="49" charset="-127"/>
+                <a:ea typeface="D2Coding" panose="020B0609020101020101" pitchFamily="49" charset="-127"/>
+              </a:rPr>
+              <a:t>를 </a:t>
+            </a:r>
+            <a:r>
+              <a:rPr lang="en-US" altLang="ko-KR" sz="1600" dirty="0">
+                <a:latin typeface="D2Coding" panose="020B0609020101020101" pitchFamily="49" charset="-127"/>
+                <a:ea typeface="D2Coding" panose="020B0609020101020101" pitchFamily="49" charset="-127"/>
+              </a:rPr>
+              <a:t>LLM</a:t>
+            </a:r>
+            <a:r>
+              <a:rPr lang="ko-KR" altLang="en-US" sz="1600" dirty="0">
+                <a:latin typeface="D2Coding" panose="020B0609020101020101" pitchFamily="49" charset="-127"/>
+                <a:ea typeface="D2Coding" panose="020B0609020101020101" pitchFamily="49" charset="-127"/>
+              </a:rPr>
+              <a:t>이 질문을 </a:t>
+            </a:r>
+            <a:r>
+              <a:rPr lang="en-US" altLang="ko-KR" sz="1600" dirty="0">
+                <a:latin typeface="D2Coding" panose="020B0609020101020101" pitchFamily="49" charset="-127"/>
+                <a:ea typeface="D2Coding" panose="020B0609020101020101" pitchFamily="49" charset="-127"/>
+              </a:rPr>
+              <a:t>3~4</a:t>
+            </a:r>
+            <a:r>
+              <a:rPr lang="ko-KR" altLang="en-US" sz="1600" dirty="0">
+                <a:latin typeface="D2Coding" panose="020B0609020101020101" pitchFamily="49" charset="-127"/>
+                <a:ea typeface="D2Coding" panose="020B0609020101020101" pitchFamily="49" charset="-127"/>
+              </a:rPr>
+              <a:t>개의 다른 표현으로 복제한 후 벡터스토어에서 조각 문서를 찾아 내기</a:t>
+            </a:r>
+            <a:endParaRPr lang="en-US" altLang="ko-KR" sz="1600" dirty="0">
+              <a:latin typeface="D2Coding" panose="020B0609020101020101" pitchFamily="49" charset="-127"/>
+              <a:ea typeface="D2Coding" panose="020B0609020101020101" pitchFamily="49" charset="-127"/>
+            </a:endParaRPr>
+          </a:p>
+        </p:txBody>
+      </p:sp>
+      <p:sp>
+        <p:nvSpPr>
+          <p:cNvPr id="2" name="슬라이드 번호 개체 틀 3">
+            <a:extLst>
+              <a:ext uri="{FF2B5EF4-FFF2-40B4-BE49-F238E27FC236}">
+                <a16:creationId xmlns:a16="http://schemas.microsoft.com/office/drawing/2014/main" id="{3A0EBC61-5B54-B46B-8BF5-8720E88B02FC}"/>
+              </a:ext>
+            </a:extLst>
+          </p:cNvPr>
+          <p:cNvSpPr txBox="1">
+            <a:spLocks/>
+          </p:cNvSpPr>
+          <p:nvPr/>
+        </p:nvSpPr>
+        <p:spPr>
+          <a:xfrm>
+            <a:off x="11162230" y="299420"/>
+            <a:ext cx="753545" cy="365125"/>
+          </a:xfrm>
+          <a:prstGeom prst="rect">
+            <a:avLst/>
+          </a:prstGeom>
+        </p:spPr>
+        <p:txBody>
+          <a:bodyPr vert="horz" lIns="91440" tIns="45720" rIns="91440" bIns="45720" rtlCol="0" anchor="ctr"/>
+          <a:lstStyle>
+            <a:defPPr rtl="0">
+              <a:defRPr lang="ko-KR"/>
+            </a:defPPr>
+            <a:lvl1pPr marL="0" algn="r" defTabSz="914400" rtl="0" eaLnBrk="1" latinLnBrk="0" hangingPunct="1">
+              <a:defRPr sz="1200" kern="1200" baseline="0">
+                <a:solidFill>
+                  <a:schemeClr val="tx1">
+                    <a:lumMod val="65000"/>
+                    <a:lumOff val="35000"/>
+                  </a:schemeClr>
+                </a:solidFill>
+                <a:latin typeface="맑은 고딕" panose="020B0503020000020004" pitchFamily="50" charset="-127"/>
+                <a:ea typeface="맑은 고딕" panose="020B0503020000020004" pitchFamily="50" charset="-127"/>
+                <a:cs typeface="+mn-cs"/>
+              </a:defRPr>
+            </a:lvl1pPr>
+            <a:lvl2pPr marL="457200" algn="l" defTabSz="914400" rtl="0" eaLnBrk="1" latinLnBrk="0" hangingPunct="1">
+              <a:defRPr sz="1800" kern="1200">
+                <a:solidFill>
+                  <a:schemeClr val="tx1"/>
+                </a:solidFill>
+                <a:latin typeface="+mn-lt"/>
+                <a:ea typeface="+mn-ea"/>
+                <a:cs typeface="+mn-cs"/>
+              </a:defRPr>
+            </a:lvl2pPr>
+            <a:lvl3pPr marL="914400" algn="l" defTabSz="914400" rtl="0" eaLnBrk="1" latinLnBrk="0" hangingPunct="1">
+              <a:defRPr sz="1800" kern="1200">
+                <a:solidFill>
+                  <a:schemeClr val="tx1"/>
+                </a:solidFill>
+                <a:latin typeface="+mn-lt"/>
+                <a:ea typeface="+mn-ea"/>
+                <a:cs typeface="+mn-cs"/>
+              </a:defRPr>
+            </a:lvl3pPr>
+            <a:lvl4pPr marL="1371600" algn="l" defTabSz="914400" rtl="0" eaLnBrk="1" latinLnBrk="0" hangingPunct="1">
+              <a:defRPr sz="1800" kern="1200">
+                <a:solidFill>
+                  <a:schemeClr val="tx1"/>
+                </a:solidFill>
+                <a:latin typeface="+mn-lt"/>
+                <a:ea typeface="+mn-ea"/>
+                <a:cs typeface="+mn-cs"/>
+              </a:defRPr>
+            </a:lvl4pPr>
+            <a:lvl5pPr marL="1828800" algn="l" defTabSz="914400" rtl="0" eaLnBrk="1" latinLnBrk="0" hangingPunct="1">
+              <a:defRPr sz="1800" kern="1200">
+                <a:solidFill>
+                  <a:schemeClr val="tx1"/>
+                </a:solidFill>
+                <a:latin typeface="+mn-lt"/>
+                <a:ea typeface="+mn-ea"/>
+                <a:cs typeface="+mn-cs"/>
+              </a:defRPr>
+            </a:lvl5pPr>
+            <a:lvl6pPr marL="2286000" algn="l" defTabSz="914400" rtl="0" eaLnBrk="1" latinLnBrk="0" hangingPunct="1">
+              <a:defRPr sz="1800" kern="1200">
+                <a:solidFill>
+                  <a:schemeClr val="tx1"/>
+                </a:solidFill>
+                <a:latin typeface="+mn-lt"/>
+                <a:ea typeface="+mn-ea"/>
+                <a:cs typeface="+mn-cs"/>
+              </a:defRPr>
+            </a:lvl6pPr>
+            <a:lvl7pPr marL="2743200" algn="l" defTabSz="914400" rtl="0" eaLnBrk="1" latinLnBrk="0" hangingPunct="1">
+              <a:defRPr sz="1800" kern="1200">
+                <a:solidFill>
+                  <a:schemeClr val="tx1"/>
+                </a:solidFill>
+                <a:latin typeface="+mn-lt"/>
+                <a:ea typeface="+mn-ea"/>
+                <a:cs typeface="+mn-cs"/>
+              </a:defRPr>
+            </a:lvl7pPr>
+            <a:lvl8pPr marL="3200400" algn="l" defTabSz="914400" rtl="0" eaLnBrk="1" latinLnBrk="0" hangingPunct="1">
+              <a:defRPr sz="1800" kern="1200">
+                <a:solidFill>
+                  <a:schemeClr val="tx1"/>
+                </a:solidFill>
+                <a:latin typeface="+mn-lt"/>
+                <a:ea typeface="+mn-ea"/>
+                <a:cs typeface="+mn-cs"/>
+              </a:defRPr>
+            </a:lvl8pPr>
+            <a:lvl9pPr marL="3657600" algn="l" defTabSz="914400" rtl="0" eaLnBrk="1" latinLnBrk="0" hangingPunct="1">
+              <a:defRPr sz="1800" kern="1200">
+                <a:solidFill>
+                  <a:schemeClr val="tx1"/>
+                </a:solidFill>
+                <a:latin typeface="+mn-lt"/>
+                <a:ea typeface="+mn-ea"/>
+                <a:cs typeface="+mn-cs"/>
+              </a:defRPr>
+            </a:lvl9pPr>
+          </a:lstStyle>
+          <a:p>
+            <a:fld id="{D57F1E4F-1CFF-5643-939E-217C01CDF565}" type="slidenum">
+              <a:rPr lang="en-US" b="1" smtClean="0"/>
+              <a:pPr/>
+              <a:t>12</a:t>
+            </a:fld>
+            <a:endParaRPr lang="en-US" b="1" dirty="0"/>
+          </a:p>
+        </p:txBody>
+      </p:sp>
+    </p:spTree>
+    <p:extLst>
+      <p:ext uri="{BB962C8B-B14F-4D97-AF65-F5344CB8AC3E}">
+        <p14:creationId xmlns:p14="http://schemas.microsoft.com/office/powerpoint/2010/main" val="2539628745"/>
+      </p:ext>
+    </p:extLst>
+  </p:cSld>
+  <p:clrMapOvr>
+    <a:masterClrMapping/>
+  </p:clrMapOvr>
+</p:sld>
+</file>
+
+<file path=ppt/slides/slide13.xml><?xml version="1.0" encoding="utf-8"?>
 <p:sld xmlns:a="http://schemas.openxmlformats.org/drawingml/2006/main" xmlns:r="http://schemas.openxmlformats.org/officeDocument/2006/relationships" xmlns:p="http://schemas.openxmlformats.org/presentationml/2006/main">
   <p:cSld>
     <p:spTree>
@@ -4376,21 +5019,7 @@
                 <a:latin typeface="D2Coding" panose="020B0609020101020101" pitchFamily="49" charset="-127"/>
                 <a:ea typeface="D2Coding" panose="020B0609020101020101" pitchFamily="49" charset="-127"/>
               </a:rPr>
-              <a:t>를 모두 랭킹을 부여하여 각 </a:t>
-            </a:r>
-            <a:r>
-              <a:rPr lang="en-US" altLang="ko-KR" sz="1600" dirty="0">
-                <a:latin typeface="D2Coding" panose="020B0609020101020101" pitchFamily="49" charset="-127"/>
-                <a:ea typeface="D2Coding" panose="020B0609020101020101" pitchFamily="49" charset="-127"/>
-              </a:rPr>
-              <a:t> </a:t>
-            </a:r>
-            <a:r>
-              <a:rPr lang="ko-KR" altLang="en-US" sz="1600" dirty="0">
-                <a:latin typeface="D2Coding" panose="020B0609020101020101" pitchFamily="49" charset="-127"/>
-                <a:ea typeface="D2Coding" panose="020B0609020101020101" pitchFamily="49" charset="-127"/>
-              </a:rPr>
-              <a:t>사용자가 의도한 표현을 정확히 포착하고</a:t>
+              <a:t>를 모두 랭킹을 부여하여 각 사용자가 의도한 표현을 정확히 포착하고</a:t>
             </a:r>
             <a:r>
               <a:rPr lang="en-US" altLang="ko-KR" sz="1600" dirty="0">
@@ -4470,6 +5099,11 @@
             <a:avLst/>
           </a:prstGeom>
           <a:noFill/>
+          <a:ln>
+            <a:solidFill>
+              <a:schemeClr val="tx1"/>
+            </a:solidFill>
+          </a:ln>
           <a:extLst>
             <a:ext uri="{909E8E84-426E-40DD-AFC4-6F175D3DCCD1}">
               <a14:hiddenFill xmlns:a14="http://schemas.microsoft.com/office/drawing/2010/main">
@@ -4651,7 +5285,7 @@
             <a:fld id="{D57F1E4F-1CFF-5643-939E-217C01CDF565}" type="slidenum">
               <a:rPr lang="en-US" b="1" smtClean="0"/>
               <a:pPr/>
-              <a:t>12</a:t>
+              <a:t>13</a:t>
             </a:fld>
             <a:endParaRPr lang="en-US" b="1" dirty="0"/>
           </a:p>
@@ -4670,7 +5304,7 @@
 </p:sld>
 </file>
 
-<file path=ppt/slides/slide13.xml><?xml version="1.0" encoding="utf-8"?>
+<file path=ppt/slides/slide14.xml><?xml version="1.0" encoding="utf-8"?>
 <p:sld xmlns:a="http://schemas.openxmlformats.org/drawingml/2006/main" xmlns:r="http://schemas.openxmlformats.org/officeDocument/2006/relationships" xmlns:p="http://schemas.openxmlformats.org/presentationml/2006/main">
   <p:cSld>
     <p:spTree>
@@ -5177,7 +5811,7 @@
             <a:fld id="{D57F1E4F-1CFF-5643-939E-217C01CDF565}" type="slidenum">
               <a:rPr lang="en-US" b="1" smtClean="0"/>
               <a:pPr/>
-              <a:t>13</a:t>
+              <a:t>14</a:t>
             </a:fld>
             <a:endParaRPr lang="en-US" b="1" dirty="0"/>
           </a:p>
@@ -5196,7 +5830,7 @@
 </p:sld>
 </file>
 
-<file path=ppt/slides/slide14.xml><?xml version="1.0" encoding="utf-8"?>
+<file path=ppt/slides/slide15.xml><?xml version="1.0" encoding="utf-8"?>
 <p:sld xmlns:a="http://schemas.openxmlformats.org/drawingml/2006/main" xmlns:r="http://schemas.openxmlformats.org/officeDocument/2006/relationships" xmlns:p="http://schemas.openxmlformats.org/presentationml/2006/main">
   <p:cSld>
     <p:spTree>
@@ -5309,7 +5943,7 @@
         <p:spPr>
           <a:xfrm>
             <a:off x="585787" y="1481168"/>
-            <a:ext cx="11020425" cy="4555093"/>
+            <a:ext cx="11020425" cy="4985980"/>
           </a:xfrm>
           <a:prstGeom prst="rect">
             <a:avLst/>
@@ -5542,294 +6176,92 @@
               </a:rPr>
               <a:t> </a:t>
             </a:r>
-            <a:r>
-              <a:rPr lang="en-US" altLang="ko-KR" sz="1600" dirty="0">
-                <a:latin typeface="D2Coding" panose="020B0609020101020101" pitchFamily="49" charset="-127"/>
-                <a:ea typeface="D2Coding" panose="020B0609020101020101" pitchFamily="49" charset="-127"/>
-              </a:rPr>
-              <a:t>"</a:t>
-            </a:r>
-            <a:r>
-              <a:rPr lang="ko-KR" altLang="en-US" sz="1600" dirty="0">
-                <a:latin typeface="D2Coding" panose="020B0609020101020101" pitchFamily="49" charset="-127"/>
-                <a:ea typeface="D2Coding" panose="020B0609020101020101" pitchFamily="49" charset="-127"/>
-              </a:rPr>
-              <a:t>안녕하세요</a:t>
-            </a:r>
-            <a:r>
-              <a:rPr lang="en-US" altLang="ko-KR" sz="1600" dirty="0">
-                <a:latin typeface="D2Coding" panose="020B0609020101020101" pitchFamily="49" charset="-127"/>
-                <a:ea typeface="D2Coding" panose="020B0609020101020101" pitchFamily="49" charset="-127"/>
-              </a:rPr>
-              <a:t>, </a:t>
-            </a:r>
-            <a:r>
-              <a:rPr lang="ko-KR" altLang="en-US" sz="1600" dirty="0">
-                <a:latin typeface="D2Coding" panose="020B0609020101020101" pitchFamily="49" charset="-127"/>
-                <a:ea typeface="D2Coding" panose="020B0609020101020101" pitchFamily="49" charset="-127"/>
-              </a:rPr>
-              <a:t>혹시 다름이 아니라 </a:t>
-            </a:r>
-            <a:r>
-              <a:rPr lang="en-US" altLang="ko-KR" sz="1600" dirty="0">
-                <a:latin typeface="D2Coding" panose="020B0609020101020101" pitchFamily="49" charset="-127"/>
-                <a:ea typeface="D2Coding" panose="020B0609020101020101" pitchFamily="49" charset="-127"/>
-              </a:rPr>
-              <a:t>2026</a:t>
-            </a:r>
-            <a:r>
-              <a:rPr lang="ko-KR" altLang="en-US" sz="1600" dirty="0">
-                <a:latin typeface="D2Coding" panose="020B0609020101020101" pitchFamily="49" charset="-127"/>
-                <a:ea typeface="D2Coding" panose="020B0609020101020101" pitchFamily="49" charset="-127"/>
-              </a:rPr>
-              <a:t>년 연말정산 프로세스에 대해 알고 싶어서 문의 드리는데</a:t>
-            </a:r>
-            <a:r>
-              <a:rPr lang="en-US" altLang="ko-KR" sz="1600" dirty="0">
-                <a:latin typeface="D2Coding" panose="020B0609020101020101" pitchFamily="49" charset="-127"/>
-                <a:ea typeface="D2Coding" panose="020B0609020101020101" pitchFamily="49" charset="-127"/>
-              </a:rPr>
-              <a:t>..."</a:t>
-            </a:r>
-            <a:r>
-              <a:rPr lang="ko-KR" altLang="en-US" sz="1600" dirty="0">
-                <a:latin typeface="D2Coding" panose="020B0609020101020101" pitchFamily="49" charset="-127"/>
-                <a:ea typeface="D2Coding" panose="020B0609020101020101" pitchFamily="49" charset="-127"/>
-              </a:rPr>
-              <a:t>에서 인사말이나 불필요한 수식어를 깎아내고 </a:t>
-            </a:r>
-            <a:r>
-              <a:rPr lang="en-US" altLang="ko-KR" sz="1600" dirty="0">
-                <a:latin typeface="D2Coding" panose="020B0609020101020101" pitchFamily="49" charset="-127"/>
-                <a:ea typeface="D2Coding" panose="020B0609020101020101" pitchFamily="49" charset="-127"/>
-              </a:rPr>
-              <a:t>2026 </a:t>
-            </a:r>
-            <a:r>
-              <a:rPr lang="ko-KR" altLang="en-US" sz="1600" dirty="0">
-                <a:latin typeface="D2Coding" panose="020B0609020101020101" pitchFamily="49" charset="-127"/>
-                <a:ea typeface="D2Coding" panose="020B0609020101020101" pitchFamily="49" charset="-127"/>
-              </a:rPr>
-              <a:t>연말정산 프로세스라는 핵심 키워드만 남겨라</a:t>
-            </a:r>
-            <a:r>
-              <a:rPr lang="en-US" altLang="ko-KR" sz="1600" dirty="0">
-                <a:latin typeface="D2Coding" panose="020B0609020101020101" pitchFamily="49" charset="-127"/>
-                <a:ea typeface="D2Coding" panose="020B0609020101020101" pitchFamily="49" charset="-127"/>
-              </a:rPr>
-              <a:t>!</a:t>
-            </a:r>
-          </a:p>
-          <a:p>
-            <a:pPr marL="742950" lvl="1" indent="-285750">
-              <a:buFont typeface="Wingdings" panose="05000000000000000000" pitchFamily="2" charset="2"/>
-              <a:buChar char="v"/>
-            </a:pPr>
             <a:endParaRPr lang="en-US" altLang="ko-KR" sz="1600" dirty="0">
               <a:latin typeface="D2Coding" panose="020B0609020101020101" pitchFamily="49" charset="-127"/>
               <a:ea typeface="D2Coding" panose="020B0609020101020101" pitchFamily="49" charset="-127"/>
             </a:endParaRPr>
           </a:p>
           <a:p>
-            <a:pPr marL="742950" lvl="1" indent="-285750">
+            <a:pPr marL="1200150" lvl="2" indent="-285750">
               <a:buFont typeface="Wingdings" panose="05000000000000000000" pitchFamily="2" charset="2"/>
               <a:buChar char="v"/>
             </a:pPr>
             <a:r>
-              <a:rPr lang="ko-KR" altLang="en-US" sz="1600" dirty="0">
-                <a:latin typeface="D2Coding" panose="020B0609020101020101" pitchFamily="49" charset="-127"/>
-                <a:ea typeface="D2Coding" panose="020B0609020101020101" pitchFamily="49" charset="-127"/>
-              </a:rPr>
-              <a:t>대화 맥락 반영 </a:t>
-            </a:r>
-            <a:r>
-              <a:rPr lang="en-US" altLang="ko-KR" sz="1600" dirty="0">
-                <a:latin typeface="D2Coding" panose="020B0609020101020101" pitchFamily="49" charset="-127"/>
-                <a:ea typeface="D2Coding" panose="020B0609020101020101" pitchFamily="49" charset="-127"/>
-              </a:rPr>
-              <a:t>(Grounding with past history):</a:t>
-            </a:r>
-            <a:r>
-              <a:rPr lang="ko-KR" altLang="en-US" sz="1600" dirty="0">
-                <a:latin typeface="D2Coding" panose="020B0609020101020101" pitchFamily="49" charset="-127"/>
-                <a:ea typeface="D2Coding" panose="020B0609020101020101" pitchFamily="49" charset="-127"/>
-              </a:rPr>
-              <a:t> 사용자가 이전에 </a:t>
-            </a:r>
-            <a:r>
-              <a:rPr lang="en-US" altLang="ko-KR" sz="1600" dirty="0">
+              <a:rPr lang="en-US" altLang="ko-KR" sz="1400" dirty="0">
                 <a:latin typeface="D2Coding" panose="020B0609020101020101" pitchFamily="49" charset="-127"/>
                 <a:ea typeface="D2Coding" panose="020B0609020101020101" pitchFamily="49" charset="-127"/>
               </a:rPr>
               <a:t>"</a:t>
             </a:r>
             <a:r>
-              <a:rPr lang="ko-KR" altLang="en-US" sz="1600" dirty="0">
-                <a:latin typeface="D2Coding" panose="020B0609020101020101" pitchFamily="49" charset="-127"/>
-                <a:ea typeface="D2Coding" panose="020B0609020101020101" pitchFamily="49" charset="-127"/>
-              </a:rPr>
-              <a:t>샌프란시스코</a:t>
-            </a:r>
-            <a:r>
-              <a:rPr lang="en-US" altLang="ko-KR" sz="1600" dirty="0">
-                <a:latin typeface="D2Coding" panose="020B0609020101020101" pitchFamily="49" charset="-127"/>
-                <a:ea typeface="D2Coding" panose="020B0609020101020101" pitchFamily="49" charset="-127"/>
-              </a:rPr>
-              <a:t>(SF) </a:t>
-            </a:r>
-            <a:r>
-              <a:rPr lang="ko-KR" altLang="en-US" sz="1600" dirty="0">
-                <a:latin typeface="D2Coding" panose="020B0609020101020101" pitchFamily="49" charset="-127"/>
-                <a:ea typeface="D2Coding" panose="020B0609020101020101" pitchFamily="49" charset="-127"/>
-              </a:rPr>
-              <a:t>날씨 어때</a:t>
-            </a:r>
-            <a:r>
-              <a:rPr lang="en-US" altLang="ko-KR" sz="1600" dirty="0">
-                <a:latin typeface="D2Coding" panose="020B0609020101020101" pitchFamily="49" charset="-127"/>
-                <a:ea typeface="D2Coding" panose="020B0609020101020101" pitchFamily="49" charset="-127"/>
-              </a:rPr>
-              <a:t>?"</a:t>
-            </a:r>
-            <a:r>
-              <a:rPr lang="ko-KR" altLang="en-US" sz="1600" dirty="0">
-                <a:latin typeface="D2Coding" panose="020B0609020101020101" pitchFamily="49" charset="-127"/>
-                <a:ea typeface="D2Coding" panose="020B0609020101020101" pitchFamily="49" charset="-127"/>
-              </a:rPr>
-              <a:t>라고 묻고</a:t>
-            </a:r>
-            <a:r>
-              <a:rPr lang="en-US" altLang="ko-KR" sz="1600" dirty="0">
+              <a:rPr lang="ko-KR" altLang="en-US" sz="1400" dirty="0">
+                <a:latin typeface="D2Coding" panose="020B0609020101020101" pitchFamily="49" charset="-127"/>
+                <a:ea typeface="D2Coding" panose="020B0609020101020101" pitchFamily="49" charset="-127"/>
+              </a:rPr>
+              <a:t>안녕하세요</a:t>
+            </a:r>
+            <a:r>
+              <a:rPr lang="en-US" altLang="ko-KR" sz="1400" dirty="0">
                 <a:latin typeface="D2Coding" panose="020B0609020101020101" pitchFamily="49" charset="-127"/>
                 <a:ea typeface="D2Coding" panose="020B0609020101020101" pitchFamily="49" charset="-127"/>
               </a:rPr>
               <a:t>, </a:t>
             </a:r>
             <a:r>
-              <a:rPr lang="ko-KR" altLang="en-US" sz="1600" dirty="0">
-                <a:latin typeface="D2Coding" panose="020B0609020101020101" pitchFamily="49" charset="-127"/>
-                <a:ea typeface="D2Coding" panose="020B0609020101020101" pitchFamily="49" charset="-127"/>
-              </a:rPr>
-              <a:t>이어서 </a:t>
-            </a:r>
-            <a:r>
-              <a:rPr lang="en-US" altLang="ko-KR" sz="1600" dirty="0">
-                <a:latin typeface="D2Coding" panose="020B0609020101020101" pitchFamily="49" charset="-127"/>
-                <a:ea typeface="D2Coding" panose="020B0609020101020101" pitchFamily="49" charset="-127"/>
-              </a:rPr>
-              <a:t>"</a:t>
-            </a:r>
-            <a:r>
-              <a:rPr lang="ko-KR" altLang="en-US" sz="1600" dirty="0">
-                <a:latin typeface="D2Coding" panose="020B0609020101020101" pitchFamily="49" charset="-127"/>
-                <a:ea typeface="D2Coding" panose="020B0609020101020101" pitchFamily="49" charset="-127"/>
-              </a:rPr>
-              <a:t>그럼 </a:t>
-            </a:r>
-            <a:r>
-              <a:rPr lang="en-US" altLang="ko-KR" sz="1600" dirty="0">
-                <a:latin typeface="D2Coding" panose="020B0609020101020101" pitchFamily="49" charset="-127"/>
-                <a:ea typeface="D2Coding" panose="020B0609020101020101" pitchFamily="49" charset="-127"/>
-              </a:rPr>
-              <a:t>LA</a:t>
-            </a:r>
-            <a:r>
-              <a:rPr lang="ko-KR" altLang="en-US" sz="1600" dirty="0">
-                <a:latin typeface="D2Coding" panose="020B0609020101020101" pitchFamily="49" charset="-127"/>
-                <a:ea typeface="D2Coding" panose="020B0609020101020101" pitchFamily="49" charset="-127"/>
-              </a:rPr>
-              <a:t>는</a:t>
-            </a:r>
-            <a:r>
-              <a:rPr lang="en-US" altLang="ko-KR" sz="1600" dirty="0">
-                <a:latin typeface="D2Coding" panose="020B0609020101020101" pitchFamily="49" charset="-127"/>
-                <a:ea typeface="D2Coding" panose="020B0609020101020101" pitchFamily="49" charset="-127"/>
-              </a:rPr>
-              <a:t>?"</a:t>
-            </a:r>
-            <a:r>
-              <a:rPr lang="ko-KR" altLang="en-US" sz="1600" dirty="0">
-                <a:latin typeface="D2Coding" panose="020B0609020101020101" pitchFamily="49" charset="-127"/>
-                <a:ea typeface="D2Coding" panose="020B0609020101020101" pitchFamily="49" charset="-127"/>
-              </a:rPr>
-              <a:t>이라고 했다면</a:t>
-            </a:r>
-            <a:r>
-              <a:rPr lang="en-US" altLang="ko-KR" sz="1600" dirty="0">
-                <a:latin typeface="D2Coding" panose="020B0609020101020101" pitchFamily="49" charset="-127"/>
-                <a:ea typeface="D2Coding" panose="020B0609020101020101" pitchFamily="49" charset="-127"/>
-              </a:rPr>
-              <a:t>, </a:t>
-            </a:r>
-            <a:r>
-              <a:rPr lang="ko-KR" altLang="en-US" sz="1600" dirty="0">
-                <a:latin typeface="D2Coding" panose="020B0609020101020101" pitchFamily="49" charset="-127"/>
-                <a:ea typeface="D2Coding" panose="020B0609020101020101" pitchFamily="49" charset="-127"/>
-              </a:rPr>
-              <a:t>컴퓨터는 </a:t>
-            </a:r>
-            <a:r>
-              <a:rPr lang="en-US" altLang="ko-KR" sz="1600" dirty="0">
-                <a:latin typeface="D2Coding" panose="020B0609020101020101" pitchFamily="49" charset="-127"/>
-                <a:ea typeface="D2Coding" panose="020B0609020101020101" pitchFamily="49" charset="-127"/>
-              </a:rPr>
-              <a:t>LA</a:t>
-            </a:r>
-            <a:r>
-              <a:rPr lang="ko-KR" altLang="en-US" sz="1600" dirty="0">
-                <a:latin typeface="D2Coding" panose="020B0609020101020101" pitchFamily="49" charset="-127"/>
-                <a:ea typeface="D2Coding" panose="020B0609020101020101" pitchFamily="49" charset="-127"/>
-              </a:rPr>
-              <a:t>의 무엇을 묻는지 알 수 없습니다</a:t>
-            </a:r>
-            <a:r>
-              <a:rPr lang="en-US" altLang="ko-KR" sz="1600" dirty="0">
-                <a:latin typeface="D2Coding" panose="020B0609020101020101" pitchFamily="49" charset="-127"/>
-                <a:ea typeface="D2Coding" panose="020B0609020101020101" pitchFamily="49" charset="-127"/>
-              </a:rPr>
-              <a:t>. </a:t>
-            </a:r>
-            <a:r>
-              <a:rPr lang="ko-KR" altLang="en-US" sz="1600" dirty="0">
-                <a:latin typeface="D2Coding" panose="020B0609020101020101" pitchFamily="49" charset="-127"/>
-                <a:ea typeface="D2Coding" panose="020B0609020101020101" pitchFamily="49" charset="-127"/>
-              </a:rPr>
-              <a:t>이전 대화 맥락을 합쳐 </a:t>
-            </a:r>
-            <a:r>
-              <a:rPr lang="en-US" altLang="ko-KR" sz="1600" dirty="0">
-                <a:latin typeface="D2Coding" panose="020B0609020101020101" pitchFamily="49" charset="-127"/>
-                <a:ea typeface="D2Coding" panose="020B0609020101020101" pitchFamily="49" charset="-127"/>
-              </a:rPr>
-              <a:t>LA </a:t>
-            </a:r>
-            <a:r>
-              <a:rPr lang="ko-KR" altLang="en-US" sz="1600" dirty="0">
-                <a:latin typeface="D2Coding" panose="020B0609020101020101" pitchFamily="49" charset="-127"/>
-                <a:ea typeface="D2Coding" panose="020B0609020101020101" pitchFamily="49" charset="-127"/>
-              </a:rPr>
-              <a:t>날씨라는 온전한 질문으로 복원하라</a:t>
-            </a:r>
-            <a:r>
-              <a:rPr lang="en-US" altLang="ko-KR" sz="1600" dirty="0">
-                <a:latin typeface="D2Coding" panose="020B0609020101020101" pitchFamily="49" charset="-127"/>
-                <a:ea typeface="D2Coding" panose="020B0609020101020101" pitchFamily="49" charset="-127"/>
-              </a:rPr>
-              <a:t>!(</a:t>
-            </a:r>
-            <a:r>
-              <a:rPr lang="en-US" altLang="ko-KR" sz="1600" dirty="0" err="1">
-                <a:latin typeface="D2Coding" panose="020B0609020101020101" pitchFamily="49" charset="-127"/>
-                <a:ea typeface="D2Coding" panose="020B0609020101020101" pitchFamily="49" charset="-127"/>
-              </a:rPr>
-              <a:t>ConversationalRetrievalChain</a:t>
-            </a:r>
-            <a:r>
-              <a:rPr lang="en-US" altLang="ko-KR" sz="1600" dirty="0">
-                <a:latin typeface="D2Coding" panose="020B0609020101020101" pitchFamily="49" charset="-127"/>
-                <a:ea typeface="D2Coding" panose="020B0609020101020101" pitchFamily="49" charset="-127"/>
-              </a:rPr>
-              <a:t>)</a:t>
+              <a:rPr lang="ko-KR" altLang="en-US" sz="1400" dirty="0">
+                <a:latin typeface="D2Coding" panose="020B0609020101020101" pitchFamily="49" charset="-127"/>
+                <a:ea typeface="D2Coding" panose="020B0609020101020101" pitchFamily="49" charset="-127"/>
+              </a:rPr>
+              <a:t>혹시 다름이 아니라 </a:t>
+            </a:r>
+            <a:r>
+              <a:rPr lang="en-US" altLang="ko-KR" sz="1400" dirty="0">
+                <a:latin typeface="D2Coding" panose="020B0609020101020101" pitchFamily="49" charset="-127"/>
+                <a:ea typeface="D2Coding" panose="020B0609020101020101" pitchFamily="49" charset="-127"/>
+              </a:rPr>
+              <a:t>2026</a:t>
+            </a:r>
+            <a:r>
+              <a:rPr lang="ko-KR" altLang="en-US" sz="1400" dirty="0">
+                <a:latin typeface="D2Coding" panose="020B0609020101020101" pitchFamily="49" charset="-127"/>
+                <a:ea typeface="D2Coding" panose="020B0609020101020101" pitchFamily="49" charset="-127"/>
+              </a:rPr>
+              <a:t>년 연말정산 프로세스에 대해 알고 싶어서 문의 드리는데</a:t>
+            </a:r>
+            <a:r>
+              <a:rPr lang="en-US" altLang="ko-KR" sz="1400" dirty="0">
+                <a:latin typeface="D2Coding" panose="020B0609020101020101" pitchFamily="49" charset="-127"/>
+                <a:ea typeface="D2Coding" panose="020B0609020101020101" pitchFamily="49" charset="-127"/>
+              </a:rPr>
+              <a:t>..."</a:t>
+            </a:r>
+            <a:r>
+              <a:rPr lang="ko-KR" altLang="en-US" sz="1400" dirty="0">
+                <a:latin typeface="D2Coding" panose="020B0609020101020101" pitchFamily="49" charset="-127"/>
+                <a:ea typeface="D2Coding" panose="020B0609020101020101" pitchFamily="49" charset="-127"/>
+              </a:rPr>
+              <a:t>에서 인사말이나 불필요한 수식어를 깎아내고 </a:t>
+            </a:r>
+            <a:r>
+              <a:rPr lang="en-US" altLang="ko-KR" sz="1400" dirty="0">
+                <a:latin typeface="D2Coding" panose="020B0609020101020101" pitchFamily="49" charset="-127"/>
+                <a:ea typeface="D2Coding" panose="020B0609020101020101" pitchFamily="49" charset="-127"/>
+              </a:rPr>
+              <a:t>2026 </a:t>
+            </a:r>
+            <a:r>
+              <a:rPr lang="ko-KR" altLang="en-US" sz="1400" dirty="0">
+                <a:latin typeface="D2Coding" panose="020B0609020101020101" pitchFamily="49" charset="-127"/>
+                <a:ea typeface="D2Coding" panose="020B0609020101020101" pitchFamily="49" charset="-127"/>
+              </a:rPr>
+              <a:t>연말정산 프로세스라는 핵심 키워드만 남겨라</a:t>
+            </a:r>
+            <a:r>
+              <a:rPr lang="en-US" altLang="ko-KR" sz="1400" dirty="0">
+                <a:latin typeface="D2Coding" panose="020B0609020101020101" pitchFamily="49" charset="-127"/>
+                <a:ea typeface="D2Coding" panose="020B0609020101020101" pitchFamily="49" charset="-127"/>
+              </a:rPr>
+              <a:t>!</a:t>
             </a:r>
           </a:p>
           <a:p>
@@ -5848,6 +6280,235 @@
               <a:buChar char="v"/>
             </a:pPr>
             <a:r>
+              <a:rPr lang="ko-KR" altLang="en-US" sz="1600" dirty="0">
+                <a:latin typeface="D2Coding" panose="020B0609020101020101" pitchFamily="49" charset="-127"/>
+                <a:ea typeface="D2Coding" panose="020B0609020101020101" pitchFamily="49" charset="-127"/>
+              </a:rPr>
+              <a:t>대화 맥락 반영 </a:t>
+            </a:r>
+            <a:r>
+              <a:rPr lang="en-US" altLang="ko-KR" sz="1600" dirty="0">
+                <a:latin typeface="D2Coding" panose="020B0609020101020101" pitchFamily="49" charset="-127"/>
+                <a:ea typeface="D2Coding" panose="020B0609020101020101" pitchFamily="49" charset="-127"/>
+              </a:rPr>
+              <a:t>(Grounding with past history):</a:t>
+            </a:r>
+            <a:r>
+              <a:rPr lang="ko-KR" altLang="en-US" sz="1600" dirty="0">
+                <a:latin typeface="D2Coding" panose="020B0609020101020101" pitchFamily="49" charset="-127"/>
+                <a:ea typeface="D2Coding" panose="020B0609020101020101" pitchFamily="49" charset="-127"/>
+              </a:rPr>
+              <a:t> </a:t>
+            </a:r>
+            <a:endParaRPr lang="en-US" altLang="ko-KR" sz="1600" dirty="0">
+              <a:latin typeface="D2Coding" panose="020B0609020101020101" pitchFamily="49" charset="-127"/>
+              <a:ea typeface="D2Coding" panose="020B0609020101020101" pitchFamily="49" charset="-127"/>
+            </a:endParaRPr>
+          </a:p>
+          <a:p>
+            <a:pPr marL="1200150" lvl="2" indent="-285750">
+              <a:buFont typeface="Wingdings" panose="05000000000000000000" pitchFamily="2" charset="2"/>
+              <a:buChar char="v"/>
+            </a:pPr>
+            <a:r>
+              <a:rPr lang="ko-KR" altLang="en-US" sz="1400" dirty="0">
+                <a:latin typeface="D2Coding" panose="020B0609020101020101" pitchFamily="49" charset="-127"/>
+                <a:ea typeface="D2Coding" panose="020B0609020101020101" pitchFamily="49" charset="-127"/>
+              </a:rPr>
+              <a:t>사용자가 이전에 </a:t>
+            </a:r>
+            <a:r>
+              <a:rPr lang="en-US" altLang="ko-KR" sz="1400" dirty="0">
+                <a:latin typeface="D2Coding" panose="020B0609020101020101" pitchFamily="49" charset="-127"/>
+                <a:ea typeface="D2Coding" panose="020B0609020101020101" pitchFamily="49" charset="-127"/>
+              </a:rPr>
+              <a:t>"</a:t>
+            </a:r>
+            <a:r>
+              <a:rPr lang="ko-KR" altLang="en-US" sz="1400" dirty="0">
+                <a:latin typeface="D2Coding" panose="020B0609020101020101" pitchFamily="49" charset="-127"/>
+                <a:ea typeface="D2Coding" panose="020B0609020101020101" pitchFamily="49" charset="-127"/>
+              </a:rPr>
+              <a:t>샌프란시스코</a:t>
+            </a:r>
+            <a:r>
+              <a:rPr lang="en-US" altLang="ko-KR" sz="1400" dirty="0">
+                <a:latin typeface="D2Coding" panose="020B0609020101020101" pitchFamily="49" charset="-127"/>
+                <a:ea typeface="D2Coding" panose="020B0609020101020101" pitchFamily="49" charset="-127"/>
+              </a:rPr>
+              <a:t>(SF) </a:t>
+            </a:r>
+            <a:r>
+              <a:rPr lang="ko-KR" altLang="en-US" sz="1400" dirty="0">
+                <a:latin typeface="D2Coding" panose="020B0609020101020101" pitchFamily="49" charset="-127"/>
+                <a:ea typeface="D2Coding" panose="020B0609020101020101" pitchFamily="49" charset="-127"/>
+              </a:rPr>
+              <a:t>날씨 어때</a:t>
+            </a:r>
+            <a:r>
+              <a:rPr lang="en-US" altLang="ko-KR" sz="1400" dirty="0">
+                <a:latin typeface="D2Coding" panose="020B0609020101020101" pitchFamily="49" charset="-127"/>
+                <a:ea typeface="D2Coding" panose="020B0609020101020101" pitchFamily="49" charset="-127"/>
+              </a:rPr>
+              <a:t>?"</a:t>
+            </a:r>
+            <a:r>
+              <a:rPr lang="ko-KR" altLang="en-US" sz="1400" dirty="0">
+                <a:latin typeface="D2Coding" panose="020B0609020101020101" pitchFamily="49" charset="-127"/>
+                <a:ea typeface="D2Coding" panose="020B0609020101020101" pitchFamily="49" charset="-127"/>
+              </a:rPr>
+              <a:t>라고 묻고</a:t>
+            </a:r>
+            <a:r>
+              <a:rPr lang="en-US" altLang="ko-KR" sz="1400" dirty="0">
+                <a:latin typeface="D2Coding" panose="020B0609020101020101" pitchFamily="49" charset="-127"/>
+                <a:ea typeface="D2Coding" panose="020B0609020101020101" pitchFamily="49" charset="-127"/>
+              </a:rPr>
+              <a:t>, </a:t>
+            </a:r>
+            <a:r>
+              <a:rPr lang="ko-KR" altLang="en-US" sz="1400" dirty="0">
+                <a:latin typeface="D2Coding" panose="020B0609020101020101" pitchFamily="49" charset="-127"/>
+                <a:ea typeface="D2Coding" panose="020B0609020101020101" pitchFamily="49" charset="-127"/>
+              </a:rPr>
+              <a:t>이어서 </a:t>
+            </a:r>
+            <a:r>
+              <a:rPr lang="en-US" altLang="ko-KR" sz="1400" dirty="0">
+                <a:latin typeface="D2Coding" panose="020B0609020101020101" pitchFamily="49" charset="-127"/>
+                <a:ea typeface="D2Coding" panose="020B0609020101020101" pitchFamily="49" charset="-127"/>
+              </a:rPr>
+              <a:t>"</a:t>
+            </a:r>
+            <a:r>
+              <a:rPr lang="ko-KR" altLang="en-US" sz="1400" dirty="0">
+                <a:latin typeface="D2Coding" panose="020B0609020101020101" pitchFamily="49" charset="-127"/>
+                <a:ea typeface="D2Coding" panose="020B0609020101020101" pitchFamily="49" charset="-127"/>
+              </a:rPr>
+              <a:t>그럼 </a:t>
+            </a:r>
+            <a:r>
+              <a:rPr lang="en-US" altLang="ko-KR" sz="1400" dirty="0">
+                <a:latin typeface="D2Coding" panose="020B0609020101020101" pitchFamily="49" charset="-127"/>
+                <a:ea typeface="D2Coding" panose="020B0609020101020101" pitchFamily="49" charset="-127"/>
+              </a:rPr>
+              <a:t>LA</a:t>
+            </a:r>
+            <a:r>
+              <a:rPr lang="ko-KR" altLang="en-US" sz="1400" dirty="0">
+                <a:latin typeface="D2Coding" panose="020B0609020101020101" pitchFamily="49" charset="-127"/>
+                <a:ea typeface="D2Coding" panose="020B0609020101020101" pitchFamily="49" charset="-127"/>
+              </a:rPr>
+              <a:t>는</a:t>
+            </a:r>
+            <a:r>
+              <a:rPr lang="en-US" altLang="ko-KR" sz="1400" dirty="0">
+                <a:latin typeface="D2Coding" panose="020B0609020101020101" pitchFamily="49" charset="-127"/>
+                <a:ea typeface="D2Coding" panose="020B0609020101020101" pitchFamily="49" charset="-127"/>
+              </a:rPr>
+              <a:t>?"</a:t>
+            </a:r>
+            <a:r>
+              <a:rPr lang="ko-KR" altLang="en-US" sz="1400" dirty="0">
+                <a:latin typeface="D2Coding" panose="020B0609020101020101" pitchFamily="49" charset="-127"/>
+                <a:ea typeface="D2Coding" panose="020B0609020101020101" pitchFamily="49" charset="-127"/>
+              </a:rPr>
+              <a:t>이라고 했다면</a:t>
+            </a:r>
+            <a:r>
+              <a:rPr lang="en-US" altLang="ko-KR" sz="1400" dirty="0">
+                <a:latin typeface="D2Coding" panose="020B0609020101020101" pitchFamily="49" charset="-127"/>
+                <a:ea typeface="D2Coding" panose="020B0609020101020101" pitchFamily="49" charset="-127"/>
+              </a:rPr>
+              <a:t>, </a:t>
+            </a:r>
+            <a:r>
+              <a:rPr lang="ko-KR" altLang="en-US" sz="1400" dirty="0">
+                <a:latin typeface="D2Coding" panose="020B0609020101020101" pitchFamily="49" charset="-127"/>
+                <a:ea typeface="D2Coding" panose="020B0609020101020101" pitchFamily="49" charset="-127"/>
+              </a:rPr>
+              <a:t>컴퓨터는 </a:t>
+            </a:r>
+            <a:r>
+              <a:rPr lang="en-US" altLang="ko-KR" sz="1400" dirty="0">
+                <a:latin typeface="D2Coding" panose="020B0609020101020101" pitchFamily="49" charset="-127"/>
+                <a:ea typeface="D2Coding" panose="020B0609020101020101" pitchFamily="49" charset="-127"/>
+              </a:rPr>
+              <a:t>LA</a:t>
+            </a:r>
+            <a:r>
+              <a:rPr lang="ko-KR" altLang="en-US" sz="1400" dirty="0">
+                <a:latin typeface="D2Coding" panose="020B0609020101020101" pitchFamily="49" charset="-127"/>
+                <a:ea typeface="D2Coding" panose="020B0609020101020101" pitchFamily="49" charset="-127"/>
+              </a:rPr>
+              <a:t>의 무엇을 묻는지 알 수 없습니다</a:t>
+            </a:r>
+            <a:r>
+              <a:rPr lang="en-US" altLang="ko-KR" sz="1400" dirty="0">
+                <a:latin typeface="D2Coding" panose="020B0609020101020101" pitchFamily="49" charset="-127"/>
+                <a:ea typeface="D2Coding" panose="020B0609020101020101" pitchFamily="49" charset="-127"/>
+              </a:rPr>
+              <a:t>. </a:t>
+            </a:r>
+            <a:r>
+              <a:rPr lang="ko-KR" altLang="en-US" sz="1400" dirty="0">
+                <a:latin typeface="D2Coding" panose="020B0609020101020101" pitchFamily="49" charset="-127"/>
+                <a:ea typeface="D2Coding" panose="020B0609020101020101" pitchFamily="49" charset="-127"/>
+              </a:rPr>
+              <a:t>이전 대화 맥락을 합쳐 </a:t>
+            </a:r>
+            <a:r>
+              <a:rPr lang="en-US" altLang="ko-KR" sz="1400" dirty="0">
+                <a:latin typeface="D2Coding" panose="020B0609020101020101" pitchFamily="49" charset="-127"/>
+                <a:ea typeface="D2Coding" panose="020B0609020101020101" pitchFamily="49" charset="-127"/>
+              </a:rPr>
+              <a:t>LA </a:t>
+            </a:r>
+            <a:r>
+              <a:rPr lang="ko-KR" altLang="en-US" sz="1400" dirty="0">
+                <a:latin typeface="D2Coding" panose="020B0609020101020101" pitchFamily="49" charset="-127"/>
+                <a:ea typeface="D2Coding" panose="020B0609020101020101" pitchFamily="49" charset="-127"/>
+              </a:rPr>
+              <a:t>날씨라는 온전한 질문으로 복원하라</a:t>
+            </a:r>
+            <a:r>
+              <a:rPr lang="en-US" altLang="ko-KR" sz="1400" dirty="0">
+                <a:latin typeface="D2Coding" panose="020B0609020101020101" pitchFamily="49" charset="-127"/>
+                <a:ea typeface="D2Coding" panose="020B0609020101020101" pitchFamily="49" charset="-127"/>
+              </a:rPr>
+              <a:t>!(</a:t>
+            </a:r>
+            <a:r>
+              <a:rPr lang="en-US" altLang="ko-KR" sz="1400" dirty="0" err="1">
+                <a:latin typeface="D2Coding" panose="020B0609020101020101" pitchFamily="49" charset="-127"/>
+                <a:ea typeface="D2Coding" panose="020B0609020101020101" pitchFamily="49" charset="-127"/>
+              </a:rPr>
+              <a:t>ConversationalRetrievalChain</a:t>
+            </a:r>
+            <a:r>
+              <a:rPr lang="en-US" altLang="ko-KR" sz="1400" dirty="0">
+                <a:latin typeface="D2Coding" panose="020B0609020101020101" pitchFamily="49" charset="-127"/>
+                <a:ea typeface="D2Coding" panose="020B0609020101020101" pitchFamily="49" charset="-127"/>
+              </a:rPr>
+              <a:t>)</a:t>
+            </a:r>
+          </a:p>
+          <a:p>
+            <a:pPr marL="742950" lvl="1" indent="-285750">
+              <a:buFont typeface="Wingdings" panose="05000000000000000000" pitchFamily="2" charset="2"/>
+              <a:buChar char="v"/>
+            </a:pPr>
+            <a:endParaRPr lang="en-US" altLang="ko-KR" sz="1600" dirty="0">
+              <a:latin typeface="D2Coding" panose="020B0609020101020101" pitchFamily="49" charset="-127"/>
+              <a:ea typeface="D2Coding" panose="020B0609020101020101" pitchFamily="49" charset="-127"/>
+            </a:endParaRPr>
+          </a:p>
+          <a:p>
+            <a:pPr marL="742950" lvl="1" indent="-285750">
+              <a:buFont typeface="Wingdings" panose="05000000000000000000" pitchFamily="2" charset="2"/>
+              <a:buChar char="v"/>
+            </a:pPr>
+            <a:r>
               <a:rPr lang="ko-KR" altLang="en-US" sz="1600" dirty="0" err="1">
                 <a:latin typeface="D2Coding" panose="020B0609020101020101" pitchFamily="49" charset="-127"/>
                 <a:ea typeface="D2Coding" panose="020B0609020101020101" pitchFamily="49" charset="-127"/>
@@ -5875,36 +6536,46 @@
               </a:rPr>
               <a:t> </a:t>
             </a:r>
-            <a:r>
-              <a:rPr lang="en-US" altLang="ko-KR" sz="1600" dirty="0">
+            <a:endParaRPr lang="en-US" altLang="ko-KR" sz="1600" dirty="0">
+              <a:latin typeface="D2Coding" panose="020B0609020101020101" pitchFamily="49" charset="-127"/>
+              <a:ea typeface="D2Coding" panose="020B0609020101020101" pitchFamily="49" charset="-127"/>
+            </a:endParaRPr>
+          </a:p>
+          <a:p>
+            <a:pPr marL="1200150" lvl="2" indent="-285750">
+              <a:buFont typeface="Wingdings" panose="05000000000000000000" pitchFamily="2" charset="2"/>
+              <a:buChar char="v"/>
+            </a:pPr>
+            <a:r>
+              <a:rPr lang="en-US" altLang="ko-KR" sz="1400" dirty="0">
                 <a:latin typeface="D2Coding" panose="020B0609020101020101" pitchFamily="49" charset="-127"/>
                 <a:ea typeface="D2Coding" panose="020B0609020101020101" pitchFamily="49" charset="-127"/>
               </a:rPr>
               <a:t>Multi-Query</a:t>
             </a:r>
             <a:r>
-              <a:rPr lang="ko-KR" altLang="en-US" sz="1600" dirty="0">
+              <a:rPr lang="ko-KR" altLang="en-US" sz="1400" dirty="0">
                 <a:latin typeface="D2Coding" panose="020B0609020101020101" pitchFamily="49" charset="-127"/>
                 <a:ea typeface="D2Coding" panose="020B0609020101020101" pitchFamily="49" charset="-127"/>
               </a:rPr>
               <a:t>와 </a:t>
             </a:r>
             <a:r>
-              <a:rPr lang="en-US" altLang="ko-KR" sz="1600" dirty="0">
+              <a:rPr lang="en-US" altLang="ko-KR" sz="1400" dirty="0">
                 <a:latin typeface="D2Coding" panose="020B0609020101020101" pitchFamily="49" charset="-127"/>
                 <a:ea typeface="D2Coding" panose="020B0609020101020101" pitchFamily="49" charset="-127"/>
               </a:rPr>
               <a:t>RAG-Fusion</a:t>
             </a:r>
             <a:r>
-              <a:rPr lang="ko-KR" altLang="en-US" sz="1600" dirty="0">
+              <a:rPr lang="ko-KR" altLang="en-US" sz="1400" dirty="0">
                 <a:latin typeface="D2Coding" panose="020B0609020101020101" pitchFamily="49" charset="-127"/>
                 <a:ea typeface="D2Coding" panose="020B0609020101020101" pitchFamily="49" charset="-127"/>
               </a:rPr>
               <a:t>의 원리로 유의어나 연관 질문들을 여러 개 생성해 냄으로써 단 한 번의 검색으로는 놓칠 수 있었던 정답 문서들을 촘촘하게 찾아내라</a:t>
             </a:r>
             <a:r>
-              <a:rPr lang="en-US" altLang="ko-KR" sz="1600" dirty="0">
+              <a:rPr lang="en-US" altLang="ko-KR" sz="1400" dirty="0">
                 <a:latin typeface="D2Coding" panose="020B0609020101020101" pitchFamily="49" charset="-127"/>
                 <a:ea typeface="D2Coding" panose="020B0609020101020101" pitchFamily="49" charset="-127"/>
               </a:rPr>
@@ -6040,7 +6711,7 @@
             <a:fld id="{D57F1E4F-1CFF-5643-939E-217C01CDF565}" type="slidenum">
               <a:rPr lang="en-US" b="1" smtClean="0"/>
               <a:pPr/>
-              <a:t>14</a:t>
+              <a:t>15</a:t>
             </a:fld>
             <a:endParaRPr lang="en-US" b="1" dirty="0"/>
           </a:p>
@@ -6059,7 +6730,7 @@
 </p:sld>
 </file>
 
-<file path=ppt/slides/slide15.xml><?xml version="1.0" encoding="utf-8"?>
+<file path=ppt/slides/slide16.xml><?xml version="1.0" encoding="utf-8"?>
 <p:sld xmlns:a="http://schemas.openxmlformats.org/drawingml/2006/main" xmlns:r="http://schemas.openxmlformats.org/officeDocument/2006/relationships" xmlns:p="http://schemas.openxmlformats.org/presentationml/2006/main">
   <p:cSld>
     <p:spTree>
@@ -6458,7 +7129,7 @@
 </p:sld>
 </file>
 
-<file path=ppt/slides/slide16.xml><?xml version="1.0" encoding="utf-8"?>
+<file path=ppt/slides/slide17.xml><?xml version="1.0" encoding="utf-8"?>
 <p:sld xmlns:a="http://schemas.openxmlformats.org/drawingml/2006/main" xmlns:r="http://schemas.openxmlformats.org/officeDocument/2006/relationships" xmlns:p="http://schemas.openxmlformats.org/presentationml/2006/main">
   <p:cSld>
     <p:spTree>
@@ -6641,7 +7312,7 @@
         <p:spPr>
           <a:xfrm>
             <a:off x="552449" y="1248422"/>
-            <a:ext cx="11096625" cy="1162498"/>
+            <a:ext cx="11096625" cy="1116331"/>
           </a:xfrm>
           <a:prstGeom prst="rect">
             <a:avLst/>
@@ -6654,11 +7325,12 @@
           </a:bodyPr>
           <a:lstStyle/>
           <a:p>
-            <a:pPr>
+            <a:pPr marL="285750" indent="-285750">
               <a:lnSpc>
                 <a:spcPct val="150000"/>
               </a:lnSpc>
-              <a:buNone/>
+              <a:buFont typeface="Wingdings" panose="05000000000000000000" pitchFamily="2" charset="2"/>
+              <a:buChar char="v"/>
             </a:pPr>
             <a:r>
               <a:rPr lang="en-US" altLang="ko-KR" sz="1600" dirty="0">
@@ -6700,7 +7372,35 @@
                 <a:latin typeface="D2Coding" panose="020B0609020101020101" pitchFamily="49" charset="-127"/>
                 <a:ea typeface="D2Coding" panose="020B0609020101020101" pitchFamily="49" charset="-127"/>
               </a:rPr>
-              <a:t>을 활용해 정해진 규칙대로 길을 찾는 방식으로</a:t>
+              <a:t>을 활용해 </a:t>
+            </a:r>
+            <a:r>
+              <a:rPr lang="ko-KR" altLang="ko-KR" sz="1600" dirty="0" err="1">
+                <a:latin typeface="D2Coding" panose="020B0609020101020101" pitchFamily="49" charset="-127"/>
+                <a:ea typeface="D2Coding" panose="020B0609020101020101" pitchFamily="49" charset="-127"/>
+              </a:rPr>
+              <a:t>LLM이</a:t>
+            </a:r>
+            <a:r>
+              <a:rPr lang="ko-KR" altLang="ko-KR" sz="1600" dirty="0">
+                <a:latin typeface="D2Coding" panose="020B0609020101020101" pitchFamily="49" charset="-127"/>
+                <a:ea typeface="D2Coding" panose="020B0609020101020101" pitchFamily="49" charset="-127"/>
+              </a:rPr>
+              <a:t> 질문을 보고 어느 데이터 소스로 </a:t>
+            </a:r>
+            <a:r>
+              <a:rPr lang="ko-KR" altLang="ko-KR" sz="1600" dirty="0" err="1">
+                <a:latin typeface="D2Coding" panose="020B0609020101020101" pitchFamily="49" charset="-127"/>
+                <a:ea typeface="D2Coding" panose="020B0609020101020101" pitchFamily="49" charset="-127"/>
+              </a:rPr>
+              <a:t>보낼지</a:t>
+            </a:r>
+            <a:r>
+              <a:rPr lang="ko-KR" altLang="ko-KR" sz="1600" dirty="0">
+                <a:latin typeface="D2Coding" panose="020B0609020101020101" pitchFamily="49" charset="-127"/>
+                <a:ea typeface="D2Coding" panose="020B0609020101020101" pitchFamily="49" charset="-127"/>
+              </a:rPr>
+              <a:t> 직접 판단하게 하는 방식</a:t>
             </a:r>
             <a:r>
               <a:rPr lang="en-US" altLang="ko-KR" sz="1600" dirty="0">
@@ -6709,120 +7409,143 @@
               </a:rPr>
               <a:t> </a:t>
             </a:r>
-            <a:r>
-              <a:rPr lang="en-US" altLang="ko-KR" sz="1600" dirty="0" err="1">
+          </a:p>
+          <a:p>
+            <a:pPr marL="742950" lvl="1" indent="-285750">
+              <a:lnSpc>
+                <a:spcPct val="150000"/>
+              </a:lnSpc>
+              <a:buFont typeface="Wingdings" panose="05000000000000000000" pitchFamily="2" charset="2"/>
+              <a:buChar char="v"/>
+            </a:pPr>
+            <a:r>
+              <a:rPr lang="ko-KR" altLang="en-US" sz="1400" dirty="0">
+                <a:latin typeface="D2Coding" panose="020B0609020101020101" pitchFamily="49" charset="-127"/>
+                <a:ea typeface="D2Coding" panose="020B0609020101020101" pitchFamily="49" charset="-127"/>
+              </a:rPr>
+              <a:t>정해진 규칙대로 길을 찾는 방식으로</a:t>
+            </a:r>
+            <a:r>
+              <a:rPr lang="en-US" altLang="ko-KR" sz="1400" dirty="0">
+                <a:latin typeface="D2Coding" panose="020B0609020101020101" pitchFamily="49" charset="-127"/>
+                <a:ea typeface="D2Coding" panose="020B0609020101020101" pitchFamily="49" charset="-127"/>
+              </a:rPr>
+              <a:t> </a:t>
+            </a:r>
+            <a:r>
+              <a:rPr lang="en-US" altLang="ko-KR" sz="1400" dirty="0" err="1">
                 <a:latin typeface="D2Coding" panose="020B0609020101020101" pitchFamily="49" charset="-127"/>
                 <a:ea typeface="D2Coding" panose="020B0609020101020101" pitchFamily="49" charset="-127"/>
               </a:rPr>
               <a:t>Pydantic</a:t>
             </a:r>
             <a:r>
-              <a:rPr lang="ko-KR" altLang="en-US" sz="1600" dirty="0">
+              <a:rPr lang="ko-KR" altLang="en-US" sz="1400" dirty="0">
                 <a:latin typeface="D2Coding" panose="020B0609020101020101" pitchFamily="49" charset="-127"/>
                 <a:ea typeface="D2Coding" panose="020B0609020101020101" pitchFamily="49" charset="-127"/>
               </a:rPr>
               <a:t>이나 </a:t>
             </a:r>
             <a:r>
-              <a:rPr lang="en-US" altLang="ko-KR" sz="1600" dirty="0">
+              <a:rPr lang="en-US" altLang="ko-KR" sz="1400" dirty="0">
                 <a:latin typeface="D2Coding" panose="020B0609020101020101" pitchFamily="49" charset="-127"/>
                 <a:ea typeface="D2Coding" panose="020B0609020101020101" pitchFamily="49" charset="-127"/>
               </a:rPr>
               <a:t>Literal</a:t>
             </a:r>
             <a:r>
-              <a:rPr lang="ko-KR" altLang="en-US" sz="1600" dirty="0">
+              <a:rPr lang="ko-KR" altLang="en-US" sz="1400" dirty="0">
                 <a:latin typeface="D2Coding" panose="020B0609020101020101" pitchFamily="49" charset="-127"/>
                 <a:ea typeface="D2Coding" panose="020B0609020101020101" pitchFamily="49" charset="-127"/>
               </a:rPr>
               <a:t>을 활용해 결과물의 선택지</a:t>
             </a:r>
             <a:r>
-              <a:rPr lang="en-US" altLang="ko-KR" sz="1600" dirty="0">
+              <a:rPr lang="en-US" altLang="ko-KR" sz="1400" dirty="0">
                 <a:latin typeface="D2Coding" panose="020B0609020101020101" pitchFamily="49" charset="-127"/>
                 <a:ea typeface="D2Coding" panose="020B0609020101020101" pitchFamily="49" charset="-127"/>
               </a:rPr>
               <a:t>(</a:t>
             </a:r>
             <a:r>
-              <a:rPr lang="ko-KR" altLang="en-US" sz="1600" dirty="0">
+              <a:rPr lang="ko-KR" altLang="en-US" sz="1400" dirty="0">
                 <a:latin typeface="D2Coding" panose="020B0609020101020101" pitchFamily="49" charset="-127"/>
                 <a:ea typeface="D2Coding" panose="020B0609020101020101" pitchFamily="49" charset="-127"/>
               </a:rPr>
               <a:t>스키마</a:t>
             </a:r>
             <a:r>
-              <a:rPr lang="en-US" altLang="ko-KR" sz="1600" dirty="0">
+              <a:rPr lang="en-US" altLang="ko-KR" sz="1400" dirty="0">
                 <a:latin typeface="D2Coding" panose="020B0609020101020101" pitchFamily="49" charset="-127"/>
                 <a:ea typeface="D2Coding" panose="020B0609020101020101" pitchFamily="49" charset="-127"/>
               </a:rPr>
               <a:t>)</a:t>
             </a:r>
             <a:r>
-              <a:rPr lang="ko-KR" altLang="en-US" sz="1600" dirty="0">
+              <a:rPr lang="ko-KR" altLang="en-US" sz="1400" dirty="0">
                 <a:latin typeface="D2Coding" panose="020B0609020101020101" pitchFamily="49" charset="-127"/>
                 <a:ea typeface="D2Coding" panose="020B0609020101020101" pitchFamily="49" charset="-127"/>
               </a:rPr>
               <a:t>를 엄격히 제한한 뒤</a:t>
             </a:r>
             <a:r>
-              <a:rPr lang="en-US" altLang="ko-KR" sz="1600" dirty="0">
+              <a:rPr lang="en-US" altLang="ko-KR" sz="1400" dirty="0">
                 <a:latin typeface="D2Coding" panose="020B0609020101020101" pitchFamily="49" charset="-127"/>
                 <a:ea typeface="D2Coding" panose="020B0609020101020101" pitchFamily="49" charset="-127"/>
               </a:rPr>
               <a:t> </a:t>
             </a:r>
             <a:r>
-              <a:rPr lang="ko-KR" altLang="en-US" sz="1600" dirty="0">
+              <a:rPr lang="ko-KR" altLang="en-US" sz="1400" dirty="0">
                 <a:latin typeface="D2Coding" panose="020B0609020101020101" pitchFamily="49" charset="-127"/>
                 <a:ea typeface="D2Coding" panose="020B0609020101020101" pitchFamily="49" charset="-127"/>
               </a:rPr>
               <a:t>다시 </a:t>
             </a:r>
             <a:r>
-              <a:rPr lang="en-US" altLang="ko-KR" sz="1600" dirty="0">
+              <a:rPr lang="en-US" altLang="ko-KR" sz="1400" dirty="0">
                 <a:latin typeface="D2Coding" panose="020B0609020101020101" pitchFamily="49" charset="-127"/>
                 <a:ea typeface="D2Coding" panose="020B0609020101020101" pitchFamily="49" charset="-127"/>
               </a:rPr>
               <a:t>LLM</a:t>
             </a:r>
             <a:r>
-              <a:rPr lang="ko-KR" altLang="en-US" sz="1600" dirty="0">
+              <a:rPr lang="ko-KR" altLang="en-US" sz="1400" dirty="0">
                 <a:latin typeface="D2Coding" panose="020B0609020101020101" pitchFamily="49" charset="-127"/>
                 <a:ea typeface="D2Coding" panose="020B0609020101020101" pitchFamily="49" charset="-127"/>
               </a:rPr>
               <a:t>에게 </a:t>
             </a:r>
             <a:r>
-              <a:rPr lang="en-US" altLang="ko-KR" sz="1600" dirty="0">
+              <a:rPr lang="en-US" altLang="ko-KR" sz="1400" dirty="0">
                 <a:latin typeface="D2Coding" panose="020B0609020101020101" pitchFamily="49" charset="-127"/>
                 <a:ea typeface="D2Coding" panose="020B0609020101020101" pitchFamily="49" charset="-127"/>
               </a:rPr>
               <a:t>"</a:t>
             </a:r>
             <a:r>
-              <a:rPr lang="ko-KR" altLang="en-US" sz="1600" dirty="0">
+              <a:rPr lang="ko-KR" altLang="en-US" sz="1400" dirty="0">
                 <a:latin typeface="D2Coding" panose="020B0609020101020101" pitchFamily="49" charset="-127"/>
                 <a:ea typeface="D2Coding" panose="020B0609020101020101" pitchFamily="49" charset="-127"/>
               </a:rPr>
               <a:t>사용자 질문을 분석해서 이 형식에 맞춰 답해라</a:t>
             </a:r>
             <a:r>
-              <a:rPr lang="en-US" altLang="ko-KR" sz="1600" dirty="0">
+              <a:rPr lang="en-US" altLang="ko-KR" sz="1400" dirty="0">
                 <a:latin typeface="D2Coding" panose="020B0609020101020101" pitchFamily="49" charset="-127"/>
                 <a:ea typeface="D2Coding" panose="020B0609020101020101" pitchFamily="49" charset="-127"/>
               </a:rPr>
               <a:t>"</a:t>
             </a:r>
             <a:r>
-              <a:rPr lang="ko-KR" altLang="en-US" sz="1600" dirty="0">
+              <a:rPr lang="ko-KR" altLang="en-US" sz="1400" dirty="0">
                 <a:latin typeface="D2Coding" panose="020B0609020101020101" pitchFamily="49" charset="-127"/>
                 <a:ea typeface="D2Coding" panose="020B0609020101020101" pitchFamily="49" charset="-127"/>
               </a:rPr>
               <a:t>고 명령</a:t>
             </a:r>
             <a:r>
-              <a:rPr lang="en-US" altLang="ko-KR" sz="1600" dirty="0">
+              <a:rPr lang="en-US" altLang="ko-KR" sz="1400" dirty="0">
                 <a:latin typeface="D2Coding" panose="020B0609020101020101" pitchFamily="49" charset="-127"/>
                 <a:ea typeface="D2Coding" panose="020B0609020101020101" pitchFamily="49" charset="-127"/>
               </a:rPr>
@@ -7191,7 +7914,7 @@
             <a:fld id="{D57F1E4F-1CFF-5643-939E-217C01CDF565}" type="slidenum">
               <a:rPr lang="en-US" b="1" smtClean="0"/>
               <a:pPr/>
-              <a:t>16</a:t>
+              <a:t>17</a:t>
             </a:fld>
             <a:endParaRPr lang="en-US" b="1" dirty="0"/>
           </a:p>
@@ -7320,7 +8043,7 @@
 </p:sld>
 </file>
 
-<file path=ppt/slides/slide17.xml><?xml version="1.0" encoding="utf-8"?>
+<file path=ppt/slides/slide18.xml><?xml version="1.0" encoding="utf-8"?>
 <p:sld xmlns:a="http://schemas.openxmlformats.org/drawingml/2006/main" xmlns:r="http://schemas.openxmlformats.org/officeDocument/2006/relationships" xmlns:p="http://schemas.openxmlformats.org/presentationml/2006/main">
   <p:cSld>
     <p:spTree>
@@ -7916,7 +8639,7 @@
             <a:fld id="{D57F1E4F-1CFF-5643-939E-217C01CDF565}" type="slidenum">
               <a:rPr lang="en-US" b="1" smtClean="0"/>
               <a:pPr/>
-              <a:t>17</a:t>
+              <a:t>18</a:t>
             </a:fld>
             <a:endParaRPr lang="en-US" b="1" dirty="0"/>
           </a:p>
@@ -7935,7 +8658,7 @@
 </p:sld>
 </file>
 
-<file path=ppt/slides/slide18.xml><?xml version="1.0" encoding="utf-8"?>
+<file path=ppt/slides/slide19.xml><?xml version="1.0" encoding="utf-8"?>
 <p:sld xmlns:a="http://schemas.openxmlformats.org/drawingml/2006/main" xmlns:r="http://schemas.openxmlformats.org/officeDocument/2006/relationships" xmlns:p="http://schemas.openxmlformats.org/presentationml/2006/main">
   <p:cSld>
     <p:spTree>
@@ -8448,7 +9171,7 @@
             <a:fld id="{D57F1E4F-1CFF-5643-939E-217C01CDF565}" type="slidenum">
               <a:rPr lang="en-US" b="1" smtClean="0"/>
               <a:pPr/>
-              <a:t>18</a:t>
+              <a:t>19</a:t>
             </a:fld>
             <a:endParaRPr lang="en-US" b="1" dirty="0"/>
           </a:p>
@@ -8467,7 +9190,153 @@
 </p:sld>
 </file>
 
-<file path=ppt/slides/slide19.xml><?xml version="1.0" encoding="utf-8"?>
+<file path=ppt/slides/slide2.xml><?xml version="1.0" encoding="utf-8"?>
+<p:sld xmlns:a="http://schemas.openxmlformats.org/drawingml/2006/main" xmlns:r="http://schemas.openxmlformats.org/officeDocument/2006/relationships" xmlns:p="http://schemas.openxmlformats.org/presentationml/2006/main">
+  <p:cSld>
+    <p:spTree>
+      <p:nvGrpSpPr>
+        <p:cNvPr id="1" name="">
+          <a:extLst>
+            <a:ext uri="{FF2B5EF4-FFF2-40B4-BE49-F238E27FC236}">
+              <a16:creationId xmlns:a16="http://schemas.microsoft.com/office/drawing/2014/main" id="{BCFEDBDF-4942-26B7-ECF8-D411863DF1CC}"/>
+            </a:ext>
+          </a:extLst>
+        </p:cNvPr>
+        <p:cNvGrpSpPr/>
+        <p:nvPr/>
+      </p:nvGrpSpPr>
+      <p:grpSpPr>
+        <a:xfrm>
+          <a:off x="0" y="0"/>
+          <a:ext cx="0" cy="0"/>
+          <a:chOff x="0" y="0"/>
+          <a:chExt cx="0" cy="0"/>
+        </a:xfrm>
+      </p:grpSpPr>
+      <p:sp>
+        <p:nvSpPr>
+          <p:cNvPr id="4" name="슬라이드 번호 개체 틀 3">
+            <a:extLst>
+              <a:ext uri="{FF2B5EF4-FFF2-40B4-BE49-F238E27FC236}">
+                <a16:creationId xmlns:a16="http://schemas.microsoft.com/office/drawing/2014/main" id="{B32F42C0-07C8-1960-872A-C341FE529FB2}"/>
+              </a:ext>
+            </a:extLst>
+          </p:cNvPr>
+          <p:cNvSpPr>
+            <a:spLocks noGrp="1"/>
+          </p:cNvSpPr>
+          <p:nvPr>
+            <p:ph type="sldNum" sz="quarter" idx="12"/>
+          </p:nvPr>
+        </p:nvSpPr>
+        <p:spPr>
+          <a:xfrm>
+            <a:off x="10514011" y="6036261"/>
+            <a:ext cx="753545" cy="365125"/>
+          </a:xfrm>
+        </p:spPr>
+        <p:txBody>
+          <a:bodyPr/>
+          <a:lstStyle/>
+          <a:p>
+            <a:fld id="{D57F1E4F-1CFF-5643-939E-217C01CDF565}" type="slidenum">
+              <a:rPr lang="en-US" smtClean="0"/>
+              <a:pPr/>
+              <a:t>2</a:t>
+            </a:fld>
+            <a:endParaRPr lang="en-US" dirty="0"/>
+          </a:p>
+        </p:txBody>
+      </p:sp>
+      <p:sp>
+        <p:nvSpPr>
+          <p:cNvPr id="3" name="제목 1">
+            <a:extLst>
+              <a:ext uri="{FF2B5EF4-FFF2-40B4-BE49-F238E27FC236}">
+                <a16:creationId xmlns:a16="http://schemas.microsoft.com/office/drawing/2014/main" id="{C83E9E23-F77D-44D2-EB8C-9981740FAE83}"/>
+              </a:ext>
+            </a:extLst>
+          </p:cNvPr>
+          <p:cNvSpPr txBox="1">
+            <a:spLocks/>
+          </p:cNvSpPr>
+          <p:nvPr/>
+        </p:nvSpPr>
+        <p:spPr>
+          <a:xfrm>
+            <a:off x="475645" y="481983"/>
+            <a:ext cx="10353762" cy="766439"/>
+          </a:xfrm>
+          <a:prstGeom prst="rect">
+            <a:avLst/>
+          </a:prstGeom>
+        </p:spPr>
+        <p:txBody>
+          <a:bodyPr vert="horz" lIns="91440" tIns="45720" rIns="91440" bIns="45720" rtlCol="0" anchor="ctr">
+            <a:normAutofit/>
+          </a:bodyPr>
+          <a:lstStyle>
+            <a:lvl1pPr algn="ctr" defTabSz="914400" rtl="0" eaLnBrk="1" latinLnBrk="1" hangingPunct="1">
+              <a:lnSpc>
+                <a:spcPct val="90000"/>
+              </a:lnSpc>
+              <a:spcBef>
+                <a:spcPct val="0"/>
+              </a:spcBef>
+              <a:buNone/>
+              <a:defRPr sz="3200" kern="1200" cap="all" baseline="0">
+                <a:solidFill>
+                  <a:schemeClr val="tx1"/>
+                </a:solidFill>
+                <a:effectLst/>
+                <a:latin typeface="Batang" panose="02030600000101010101" pitchFamily="18" charset="-127"/>
+                <a:ea typeface="Batang" panose="02030600000101010101" pitchFamily="18" charset="-127"/>
+                <a:cs typeface="+mj-cs"/>
+              </a:defRPr>
+            </a:lvl1pPr>
+          </a:lstStyle>
+          <a:p>
+            <a:pPr algn="l"/>
+            <a:r>
+              <a:rPr lang="en-US" altLang="ko-KR" sz="2800" cap="none" dirty="0">
+                <a:solidFill>
+                  <a:schemeClr val="bg2">
+                    <a:lumMod val="25000"/>
+                  </a:schemeClr>
+                </a:solidFill>
+                <a:latin typeface="D2Coding" panose="020B0609020101020101" pitchFamily="49" charset="-127"/>
+                <a:ea typeface="D2Coding" panose="020B0609020101020101" pitchFamily="49" charset="-127"/>
+                <a:cs typeface="Segoe UI Light" panose="020B0502040204020203" pitchFamily="34" charset="0"/>
+              </a:rPr>
+              <a:t>Goals</a:t>
+            </a:r>
+            <a:endParaRPr lang="ko-KR" altLang="en-US" sz="2800" cap="none" dirty="0">
+              <a:solidFill>
+                <a:schemeClr val="bg2">
+                  <a:lumMod val="25000"/>
+                </a:schemeClr>
+              </a:solidFill>
+              <a:latin typeface="D2Coding" panose="020B0609020101020101" pitchFamily="49" charset="-127"/>
+              <a:ea typeface="D2Coding" panose="020B0609020101020101" pitchFamily="49" charset="-127"/>
+              <a:cs typeface="Segoe UI Light" panose="020B0502040204020203" pitchFamily="34" charset="0"/>
+            </a:endParaRPr>
+          </a:p>
+        </p:txBody>
+      </p:sp>
+    </p:spTree>
+    <p:extLst>
+      <p:ext uri="{BB962C8B-B14F-4D97-AF65-F5344CB8AC3E}">
+        <p14:creationId xmlns:p14="http://schemas.microsoft.com/office/powerpoint/2010/main" val="2827070286"/>
+      </p:ext>
+    </p:extLst>
+  </p:cSld>
+  <p:clrMapOvr>
+    <a:masterClrMapping/>
+  </p:clrMapOvr>
+</p:sld>
+</file>
+
+<file path=ppt/slides/slide20.xml><?xml version="1.0" encoding="utf-8"?>
 <p:sld xmlns:a="http://schemas.openxmlformats.org/drawingml/2006/main" xmlns:r="http://schemas.openxmlformats.org/officeDocument/2006/relationships" xmlns:p="http://schemas.openxmlformats.org/presentationml/2006/main">
   <p:cSld>
     <p:spTree>
@@ -8922,7 +9791,7 @@
             <a:fld id="{D57F1E4F-1CFF-5643-939E-217C01CDF565}" type="slidenum">
               <a:rPr lang="en-US" b="1" smtClean="0"/>
               <a:pPr/>
-              <a:t>19</a:t>
+              <a:t>20</a:t>
             </a:fld>
             <a:endParaRPr lang="en-US" b="1" dirty="0"/>
           </a:p>
@@ -8941,153 +9810,7 @@
 </p:sld>
 </file>
 
-<file path=ppt/slides/slide2.xml><?xml version="1.0" encoding="utf-8"?>
-<p:sld xmlns:a="http://schemas.openxmlformats.org/drawingml/2006/main" xmlns:r="http://schemas.openxmlformats.org/officeDocument/2006/relationships" xmlns:p="http://schemas.openxmlformats.org/presentationml/2006/main">
-  <p:cSld>
-    <p:spTree>
-      <p:nvGrpSpPr>
-        <p:cNvPr id="1" name="">
-          <a:extLst>
-            <a:ext uri="{FF2B5EF4-FFF2-40B4-BE49-F238E27FC236}">
-              <a16:creationId xmlns:a16="http://schemas.microsoft.com/office/drawing/2014/main" id="{BCFEDBDF-4942-26B7-ECF8-D411863DF1CC}"/>
-            </a:ext>
-          </a:extLst>
-        </p:cNvPr>
-        <p:cNvGrpSpPr/>
-        <p:nvPr/>
-      </p:nvGrpSpPr>
-      <p:grpSpPr>
-        <a:xfrm>
-          <a:off x="0" y="0"/>
-          <a:ext cx="0" cy="0"/>
-          <a:chOff x="0" y="0"/>
-          <a:chExt cx="0" cy="0"/>
-        </a:xfrm>
-      </p:grpSpPr>
-      <p:sp>
-        <p:nvSpPr>
-          <p:cNvPr id="4" name="슬라이드 번호 개체 틀 3">
-            <a:extLst>
-              <a:ext uri="{FF2B5EF4-FFF2-40B4-BE49-F238E27FC236}">
-                <a16:creationId xmlns:a16="http://schemas.microsoft.com/office/drawing/2014/main" id="{B32F42C0-07C8-1960-872A-C341FE529FB2}"/>
-              </a:ext>
-            </a:extLst>
-          </p:cNvPr>
-          <p:cNvSpPr>
-            <a:spLocks noGrp="1"/>
-          </p:cNvSpPr>
-          <p:nvPr>
-            <p:ph type="sldNum" sz="quarter" idx="12"/>
-          </p:nvPr>
-        </p:nvSpPr>
-        <p:spPr>
-          <a:xfrm>
-            <a:off x="10514011" y="6036261"/>
-            <a:ext cx="753545" cy="365125"/>
-          </a:xfrm>
-        </p:spPr>
-        <p:txBody>
-          <a:bodyPr/>
-          <a:lstStyle/>
-          <a:p>
-            <a:fld id="{D57F1E4F-1CFF-5643-939E-217C01CDF565}" type="slidenum">
-              <a:rPr lang="en-US" smtClean="0"/>
-              <a:pPr/>
-              <a:t>2</a:t>
-            </a:fld>
-            <a:endParaRPr lang="en-US" dirty="0"/>
-          </a:p>
-        </p:txBody>
-      </p:sp>
-      <p:sp>
-        <p:nvSpPr>
-          <p:cNvPr id="3" name="제목 1">
-            <a:extLst>
-              <a:ext uri="{FF2B5EF4-FFF2-40B4-BE49-F238E27FC236}">
-                <a16:creationId xmlns:a16="http://schemas.microsoft.com/office/drawing/2014/main" id="{C83E9E23-F77D-44D2-EB8C-9981740FAE83}"/>
-              </a:ext>
-            </a:extLst>
-          </p:cNvPr>
-          <p:cNvSpPr txBox="1">
-            <a:spLocks/>
-          </p:cNvSpPr>
-          <p:nvPr/>
-        </p:nvSpPr>
-        <p:spPr>
-          <a:xfrm>
-            <a:off x="475645" y="481983"/>
-            <a:ext cx="10353762" cy="766439"/>
-          </a:xfrm>
-          <a:prstGeom prst="rect">
-            <a:avLst/>
-          </a:prstGeom>
-        </p:spPr>
-        <p:txBody>
-          <a:bodyPr vert="horz" lIns="91440" tIns="45720" rIns="91440" bIns="45720" rtlCol="0" anchor="ctr">
-            <a:normAutofit/>
-          </a:bodyPr>
-          <a:lstStyle>
-            <a:lvl1pPr algn="ctr" defTabSz="914400" rtl="0" eaLnBrk="1" latinLnBrk="1" hangingPunct="1">
-              <a:lnSpc>
-                <a:spcPct val="90000"/>
-              </a:lnSpc>
-              <a:spcBef>
-                <a:spcPct val="0"/>
-              </a:spcBef>
-              <a:buNone/>
-              <a:defRPr sz="3200" kern="1200" cap="all" baseline="0">
-                <a:solidFill>
-                  <a:schemeClr val="tx1"/>
-                </a:solidFill>
-                <a:effectLst/>
-                <a:latin typeface="Batang" panose="02030600000101010101" pitchFamily="18" charset="-127"/>
-                <a:ea typeface="Batang" panose="02030600000101010101" pitchFamily="18" charset="-127"/>
-                <a:cs typeface="+mj-cs"/>
-              </a:defRPr>
-            </a:lvl1pPr>
-          </a:lstStyle>
-          <a:p>
-            <a:pPr algn="l"/>
-            <a:r>
-              <a:rPr lang="en-US" altLang="ko-KR" sz="2800" cap="none" dirty="0">
-                <a:solidFill>
-                  <a:schemeClr val="bg2">
-                    <a:lumMod val="25000"/>
-                  </a:schemeClr>
-                </a:solidFill>
-                <a:latin typeface="D2Coding" panose="020B0609020101020101" pitchFamily="49" charset="-127"/>
-                <a:ea typeface="D2Coding" panose="020B0609020101020101" pitchFamily="49" charset="-127"/>
-                <a:cs typeface="Segoe UI Light" panose="020B0502040204020203" pitchFamily="34" charset="0"/>
-              </a:rPr>
-              <a:t>Goals</a:t>
-            </a:r>
-            <a:endParaRPr lang="ko-KR" altLang="en-US" sz="2800" cap="none" dirty="0">
-              <a:solidFill>
-                <a:schemeClr val="bg2">
-                  <a:lumMod val="25000"/>
-                </a:schemeClr>
-              </a:solidFill>
-              <a:latin typeface="D2Coding" panose="020B0609020101020101" pitchFamily="49" charset="-127"/>
-              <a:ea typeface="D2Coding" panose="020B0609020101020101" pitchFamily="49" charset="-127"/>
-              <a:cs typeface="Segoe UI Light" panose="020B0502040204020203" pitchFamily="34" charset="0"/>
-            </a:endParaRPr>
-          </a:p>
-        </p:txBody>
-      </p:sp>
-    </p:spTree>
-    <p:extLst>
-      <p:ext uri="{BB962C8B-B14F-4D97-AF65-F5344CB8AC3E}">
-        <p14:creationId xmlns:p14="http://schemas.microsoft.com/office/powerpoint/2010/main" val="2827070286"/>
-      </p:ext>
-    </p:extLst>
-  </p:cSld>
-  <p:clrMapOvr>
-    <a:masterClrMapping/>
-  </p:clrMapOvr>
-</p:sld>
-</file>
-
-<file path=ppt/slides/slide20.xml><?xml version="1.0" encoding="utf-8"?>
+<file path=ppt/slides/slide21.xml><?xml version="1.0" encoding="utf-8"?>
 <p:sld xmlns:a="http://schemas.openxmlformats.org/drawingml/2006/main" xmlns:r="http://schemas.openxmlformats.org/officeDocument/2006/relationships" xmlns:p="http://schemas.openxmlformats.org/presentationml/2006/main">
   <p:cSld>
     <p:spTree>
@@ -9624,7 +10347,7 @@
             <a:fld id="{D57F1E4F-1CFF-5643-939E-217C01CDF565}" type="slidenum">
               <a:rPr lang="en-US" b="1" smtClean="0"/>
               <a:pPr/>
-              <a:t>20</a:t>
+              <a:t>21</a:t>
             </a:fld>
             <a:endParaRPr lang="en-US" b="1" dirty="0"/>
           </a:p>
@@ -9643,7 +10366,7 @@
 </p:sld>
 </file>
 
-<file path=ppt/slides/slide21.xml><?xml version="1.0" encoding="utf-8"?>
+<file path=ppt/slides/slide22.xml><?xml version="1.0" encoding="utf-8"?>
 <p:sld xmlns:a="http://schemas.openxmlformats.org/drawingml/2006/main" xmlns:r="http://schemas.openxmlformats.org/officeDocument/2006/relationships" xmlns:p="http://schemas.openxmlformats.org/presentationml/2006/main">
   <p:cSld>
     <p:spTree>
@@ -10526,7 +11249,7 @@
             <a:fld id="{D57F1E4F-1CFF-5643-939E-217C01CDF565}" type="slidenum">
               <a:rPr lang="en-US" b="1" smtClean="0"/>
               <a:pPr/>
-              <a:t>21</a:t>
+              <a:t>22</a:t>
             </a:fld>
             <a:endParaRPr lang="en-US" b="1" dirty="0"/>
           </a:p>
@@ -10690,7 +11413,21 @@
                 <a:latin typeface="D2Coding" panose="020B0609020101020101" pitchFamily="49" charset="-127"/>
                 <a:ea typeface="D2Coding" panose="020B0609020101020101" pitchFamily="49" charset="-127"/>
               </a:rPr>
-              <a:t>automated system to fetch relevant information based on a user’s query, append it as context to the prompt, and then execute the generation request to the LLM.</a:t>
+              <a:t>automated system to fetch relevant information from</a:t>
+            </a:r>
+            <a:r>
+              <a:rPr lang="ko-KR" altLang="en-US" sz="1600" b="1" dirty="0">
+                <a:latin typeface="D2Coding" panose="020B0609020101020101" pitchFamily="49" charset="-127"/>
+                <a:ea typeface="D2Coding" panose="020B0609020101020101" pitchFamily="49" charset="-127"/>
+              </a:rPr>
+              <a:t> </a:t>
+            </a:r>
+            <a:r>
+              <a:rPr lang="en-US" altLang="ko-KR" sz="1600" b="1" dirty="0">
+                <a:latin typeface="D2Coding" panose="020B0609020101020101" pitchFamily="49" charset="-127"/>
+                <a:ea typeface="D2Coding" panose="020B0609020101020101" pitchFamily="49" charset="-127"/>
+              </a:rPr>
+              <a:t>vector DB based on a user’s query, append it as context to the prompt, and then execute the generation request to the LLM.</a:t>
             </a:r>
             <a:endParaRPr lang="ko-KR" altLang="en-US" sz="1600" b="1" dirty="0">
               <a:latin typeface="D2Coding" panose="020B0609020101020101" pitchFamily="49" charset="-127"/>
@@ -11140,627 +11877,6 @@
         <p:cNvPr id="1" name="">
           <a:extLst>
             <a:ext uri="{FF2B5EF4-FFF2-40B4-BE49-F238E27FC236}">
-              <a16:creationId xmlns:a16="http://schemas.microsoft.com/office/drawing/2014/main" id="{B948372F-584A-3720-5EA3-5BC174A41D4B}"/>
-            </a:ext>
-          </a:extLst>
-        </p:cNvPr>
-        <p:cNvGrpSpPr/>
-        <p:nvPr/>
-      </p:nvGrpSpPr>
-      <p:grpSpPr>
-        <a:xfrm>
-          <a:off x="0" y="0"/>
-          <a:ext cx="0" cy="0"/>
-          <a:chOff x="0" y="0"/>
-          <a:chExt cx="0" cy="0"/>
-        </a:xfrm>
-      </p:grpSpPr>
-      <p:sp>
-        <p:nvSpPr>
-          <p:cNvPr id="3" name="제목 1">
-            <a:extLst>
-              <a:ext uri="{FF2B5EF4-FFF2-40B4-BE49-F238E27FC236}">
-                <a16:creationId xmlns:a16="http://schemas.microsoft.com/office/drawing/2014/main" id="{DFD712C7-88FF-B03C-0041-0910E14CF15B}"/>
-              </a:ext>
-            </a:extLst>
-          </p:cNvPr>
-          <p:cNvSpPr txBox="1">
-            <a:spLocks/>
-          </p:cNvSpPr>
-          <p:nvPr/>
-        </p:nvSpPr>
-        <p:spPr>
-          <a:xfrm>
-            <a:off x="475645" y="481983"/>
-            <a:ext cx="10353762" cy="766439"/>
-          </a:xfrm>
-          <a:prstGeom prst="rect">
-            <a:avLst/>
-          </a:prstGeom>
-        </p:spPr>
-        <p:txBody>
-          <a:bodyPr vert="horz" lIns="91440" tIns="45720" rIns="91440" bIns="45720" rtlCol="0" anchor="ctr">
-            <a:normAutofit/>
-          </a:bodyPr>
-          <a:lstStyle>
-            <a:lvl1pPr algn="ctr" defTabSz="914400" rtl="0" eaLnBrk="1" latinLnBrk="1" hangingPunct="1">
-              <a:lnSpc>
-                <a:spcPct val="90000"/>
-              </a:lnSpc>
-              <a:spcBef>
-                <a:spcPct val="0"/>
-              </a:spcBef>
-              <a:buNone/>
-              <a:defRPr sz="3200" kern="1200" cap="all" baseline="0">
-                <a:solidFill>
-                  <a:schemeClr val="tx1"/>
-                </a:solidFill>
-                <a:effectLst/>
-                <a:latin typeface="Batang" panose="02030600000101010101" pitchFamily="18" charset="-127"/>
-                <a:ea typeface="Batang" panose="02030600000101010101" pitchFamily="18" charset="-127"/>
-                <a:cs typeface="+mj-cs"/>
-              </a:defRPr>
-            </a:lvl1pPr>
-          </a:lstStyle>
-          <a:p>
-            <a:pPr algn="l"/>
-            <a:r>
-              <a:rPr lang="en-US" altLang="ko-KR" sz="2800" cap="none" dirty="0">
-                <a:solidFill>
-                  <a:schemeClr val="bg2">
-                    <a:lumMod val="25000"/>
-                  </a:schemeClr>
-                </a:solidFill>
-                <a:latin typeface="D2Coding" panose="020B0609020101020101" pitchFamily="49" charset="-127"/>
-                <a:ea typeface="D2Coding" panose="020B0609020101020101" pitchFamily="49" charset="-127"/>
-                <a:cs typeface="Segoe UI Light" panose="020B0502040204020203" pitchFamily="34" charset="0"/>
-              </a:rPr>
-              <a:t>Retrieving Relevant Documents</a:t>
-            </a:r>
-            <a:endParaRPr lang="ko-KR" altLang="en-US" sz="2800" cap="none" dirty="0">
-              <a:solidFill>
-                <a:schemeClr val="bg2">
-                  <a:lumMod val="25000"/>
-                </a:schemeClr>
-              </a:solidFill>
-              <a:latin typeface="D2Coding" panose="020B0609020101020101" pitchFamily="49" charset="-127"/>
-              <a:ea typeface="D2Coding" panose="020B0609020101020101" pitchFamily="49" charset="-127"/>
-              <a:cs typeface="Segoe UI Light" panose="020B0502040204020203" pitchFamily="34" charset="0"/>
-            </a:endParaRPr>
-          </a:p>
-        </p:txBody>
-      </p:sp>
-      <p:pic>
-        <p:nvPicPr>
-          <p:cNvPr id="5" name="그림 4">
-            <a:extLst>
-              <a:ext uri="{FF2B5EF4-FFF2-40B4-BE49-F238E27FC236}">
-                <a16:creationId xmlns:a16="http://schemas.microsoft.com/office/drawing/2014/main" id="{7C66EEA0-1F46-6B06-7214-66461A6330BD}"/>
-              </a:ext>
-            </a:extLst>
-          </p:cNvPr>
-          <p:cNvPicPr>
-            <a:picLocks noChangeAspect="1"/>
-          </p:cNvPicPr>
-          <p:nvPr/>
-        </p:nvPicPr>
-        <p:blipFill>
-          <a:blip r:embed="rId2"/>
-          <a:stretch>
-            <a:fillRect/>
-          </a:stretch>
-        </p:blipFill>
-        <p:spPr>
-          <a:xfrm>
-            <a:off x="628652" y="1355281"/>
-            <a:ext cx="4331276" cy="5048884"/>
-          </a:xfrm>
-          <a:prstGeom prst="rect">
-            <a:avLst/>
-          </a:prstGeom>
-        </p:spPr>
-      </p:pic>
-      <p:sp>
-        <p:nvSpPr>
-          <p:cNvPr id="8" name="TextBox 7">
-            <a:extLst>
-              <a:ext uri="{FF2B5EF4-FFF2-40B4-BE49-F238E27FC236}">
-                <a16:creationId xmlns:a16="http://schemas.microsoft.com/office/drawing/2014/main" id="{D5D42372-0CC1-F607-2405-C7C478F4983B}"/>
-              </a:ext>
-            </a:extLst>
-          </p:cNvPr>
-          <p:cNvSpPr txBox="1"/>
-          <p:nvPr/>
-        </p:nvSpPr>
-        <p:spPr>
-          <a:xfrm>
-            <a:off x="5253215" y="1355284"/>
-            <a:ext cx="6234542" cy="1531830"/>
-          </a:xfrm>
-          <a:prstGeom prst="rect">
-            <a:avLst/>
-          </a:prstGeom>
-          <a:noFill/>
-          <a:ln>
-            <a:solidFill>
-              <a:schemeClr val="tx1"/>
-            </a:solidFill>
-            <a:prstDash val="dash"/>
-          </a:ln>
-        </p:spPr>
-        <p:txBody>
-          <a:bodyPr wrap="square">
-            <a:spAutoFit/>
-          </a:bodyPr>
-          <a:lstStyle/>
-          <a:p>
-            <a:pPr>
-              <a:lnSpc>
-                <a:spcPct val="150000"/>
-              </a:lnSpc>
-            </a:pPr>
-            <a:r>
-              <a:rPr lang="en-US" altLang="ko-KR" sz="1600" dirty="0">
-                <a:latin typeface="D2Coding" panose="020B0609020101020101" pitchFamily="49" charset="-127"/>
-                <a:ea typeface="D2Coding" panose="020B0609020101020101" pitchFamily="49" charset="-127"/>
-              </a:rPr>
-              <a:t>An example flow of indexing documents alongside retrieval of relevant documents from a vector store; the Hierarchical Navigable Small World (HNSW) box depicts calculating similarity of documents against the user’s query</a:t>
-            </a:r>
-            <a:endParaRPr lang="ko-KR" altLang="en-US" sz="1600" dirty="0">
-              <a:latin typeface="D2Coding" panose="020B0609020101020101" pitchFamily="49" charset="-127"/>
-              <a:ea typeface="D2Coding" panose="020B0609020101020101" pitchFamily="49" charset="-127"/>
-            </a:endParaRPr>
-          </a:p>
-        </p:txBody>
-      </p:sp>
-      <mc:AlternateContent xmlns:mc="http://schemas.openxmlformats.org/markup-compatibility/2006" xmlns:a14="http://schemas.microsoft.com/office/drawing/2010/main">
-        <mc:Choice Requires="a14">
-          <p:sp>
-            <p:nvSpPr>
-              <p:cNvPr id="10" name="TextBox 9">
-                <a:extLst>
-                  <a:ext uri="{FF2B5EF4-FFF2-40B4-BE49-F238E27FC236}">
-                    <a16:creationId xmlns:a16="http://schemas.microsoft.com/office/drawing/2014/main" id="{AB8C37FB-284E-EC98-BE38-02540B0599AA}"/>
-                  </a:ext>
-                </a:extLst>
-              </p:cNvPr>
-              <p:cNvSpPr txBox="1"/>
-              <p:nvPr/>
-            </p:nvSpPr>
-            <p:spPr>
-              <a:xfrm>
-                <a:off x="5391757" y="3935958"/>
-                <a:ext cx="6096000" cy="981166"/>
-              </a:xfrm>
-              <a:prstGeom prst="rect">
-                <a:avLst/>
-              </a:prstGeom>
-              <a:noFill/>
-            </p:spPr>
-            <p:txBody>
-              <a:bodyPr wrap="square">
-                <a:spAutoFit/>
-              </a:bodyPr>
-              <a:lstStyle/>
-              <a:p>
-                <a:r>
-                  <a:rPr lang="en-US" altLang="ko-KR" sz="1800" dirty="0">
-                    <a:latin typeface="D2Coding" panose="020B0609020101020101" pitchFamily="49" charset="-127"/>
-                    <a:ea typeface="D2Coding" panose="020B0609020101020101" pitchFamily="49" charset="-127"/>
-                  </a:rPr>
-                  <a:t>Hierarchical Navigable Small World (HNSW)</a:t>
-                </a:r>
-              </a:p>
-              <a:p>
-                <a:pPr marL="285750" indent="-285750">
-                  <a:lnSpc>
-                    <a:spcPct val="150000"/>
-                  </a:lnSpc>
-                  <a:buFont typeface="Wingdings" panose="05000000000000000000" pitchFamily="2" charset="2"/>
-                  <a:buChar char="§"/>
-                </a:pPr>
-                <a:r>
-                  <a:rPr lang="en-US" altLang="ko-KR" sz="1400" dirty="0">
-                    <a:latin typeface="D2Coding" panose="020B0609020101020101" pitchFamily="49" charset="-127"/>
-                    <a:ea typeface="D2Coding" panose="020B0609020101020101" pitchFamily="49" charset="-127"/>
-                  </a:rPr>
-                  <a:t>RDBMS</a:t>
-                </a:r>
-                <a:r>
-                  <a:rPr lang="ko-KR" altLang="en-US" sz="1400" dirty="0">
-                    <a:latin typeface="D2Coding" panose="020B0609020101020101" pitchFamily="49" charset="-127"/>
-                    <a:ea typeface="D2Coding" panose="020B0609020101020101" pitchFamily="49" charset="-127"/>
-                  </a:rPr>
-                  <a:t>의 </a:t>
-                </a:r>
-                <a:r>
-                  <a:rPr lang="en-US" altLang="ko-KR" sz="1400" dirty="0" err="1">
-                    <a:latin typeface="D2Coding" panose="020B0609020101020101" pitchFamily="49" charset="-127"/>
-                    <a:ea typeface="D2Coding" panose="020B0609020101020101" pitchFamily="49" charset="-127"/>
-                  </a:rPr>
-                  <a:t>B+Tree</a:t>
-                </a:r>
-                <a:r>
-                  <a:rPr lang="en-US" altLang="ko-KR" sz="1400" dirty="0">
-                    <a:latin typeface="D2Coding" panose="020B0609020101020101" pitchFamily="49" charset="-127"/>
-                    <a:ea typeface="D2Coding" panose="020B0609020101020101" pitchFamily="49" charset="-127"/>
-                  </a:rPr>
-                  <a:t> </a:t>
-                </a:r>
-                <a:r>
-                  <a:rPr lang="ko-KR" altLang="en-US" sz="1400" dirty="0">
-                    <a:latin typeface="D2Coding" panose="020B0609020101020101" pitchFamily="49" charset="-127"/>
-                    <a:ea typeface="D2Coding" panose="020B0609020101020101" pitchFamily="49" charset="-127"/>
-                  </a:rPr>
-                  <a:t>알고리즘과 유사</a:t>
-                </a:r>
-                <a:r>
-                  <a:rPr lang="en-US" altLang="ko-KR" sz="1400" dirty="0">
-                    <a:latin typeface="D2Coding" panose="020B0609020101020101" pitchFamily="49" charset="-127"/>
-                    <a:ea typeface="D2Coding" panose="020B0609020101020101" pitchFamily="49" charset="-127"/>
-                  </a:rPr>
-                  <a:t> : </a:t>
-                </a:r>
-                <a:r>
-                  <a:rPr lang="ko-KR" altLang="en-US" sz="1400" dirty="0">
-                    <a:latin typeface="D2Coding" panose="020B0609020101020101" pitchFamily="49" charset="-127"/>
-                    <a:ea typeface="D2Coding" panose="020B0609020101020101" pitchFamily="49" charset="-127"/>
-                  </a:rPr>
-                  <a:t>새로운 </a:t>
-                </a:r>
-                <a:r>
-                  <a:rPr lang="en-US" altLang="ko-KR" sz="1400" dirty="0">
-                    <a:latin typeface="D2Coding" panose="020B0609020101020101" pitchFamily="49" charset="-127"/>
-                    <a:ea typeface="D2Coding" panose="020B0609020101020101" pitchFamily="49" charset="-127"/>
-                  </a:rPr>
-                  <a:t>query</a:t>
-                </a:r>
-                <a:r>
-                  <a:rPr lang="ko-KR" altLang="en-US" sz="1400" dirty="0">
-                    <a:latin typeface="D2Coding" panose="020B0609020101020101" pitchFamily="49" charset="-127"/>
-                    <a:ea typeface="D2Coding" panose="020B0609020101020101" pitchFamily="49" charset="-127"/>
-                  </a:rPr>
-                  <a:t>에 대해 </a:t>
-                </a:r>
-                <a:r>
-                  <a:rPr lang="en-US" altLang="ko-KR" sz="1400" dirty="0">
-                    <a:latin typeface="D2Coding" panose="020B0609020101020101" pitchFamily="49" charset="-127"/>
-                    <a:ea typeface="D2Coding" panose="020B0609020101020101" pitchFamily="49" charset="-127"/>
-                  </a:rPr>
-                  <a:t>N</a:t>
-                </a:r>
-                <a:r>
-                  <a:rPr lang="ko-KR" altLang="en-US" sz="1400" dirty="0">
-                    <a:latin typeface="D2Coding" panose="020B0609020101020101" pitchFamily="49" charset="-127"/>
-                    <a:ea typeface="D2Coding" panose="020B0609020101020101" pitchFamily="49" charset="-127"/>
-                  </a:rPr>
-                  <a:t>개의 </a:t>
-                </a:r>
-                <a:r>
-                  <a:rPr lang="en-US" altLang="ko-KR" sz="1400" dirty="0">
-                    <a:latin typeface="D2Coding" panose="020B0609020101020101" pitchFamily="49" charset="-127"/>
-                    <a:ea typeface="D2Coding" panose="020B0609020101020101" pitchFamily="49" charset="-127"/>
-                  </a:rPr>
-                  <a:t>vectors</a:t>
-                </a:r>
-                <a:r>
-                  <a:rPr lang="ko-KR" altLang="en-US" sz="1400" dirty="0">
-                    <a:latin typeface="D2Coding" panose="020B0609020101020101" pitchFamily="49" charset="-127"/>
-                    <a:ea typeface="D2Coding" panose="020B0609020101020101" pitchFamily="49" charset="-127"/>
-                  </a:rPr>
-                  <a:t>를 대상으로 검색　시 </a:t>
-                </a:r>
-                <a:r>
-                  <a:rPr lang="en-US" altLang="ko-KR" sz="1400" dirty="0">
-                    <a:latin typeface="D2Coding" panose="020B0609020101020101" pitchFamily="49" charset="-127"/>
-                    <a:ea typeface="D2Coding" panose="020B0609020101020101" pitchFamily="49" charset="-127"/>
-                  </a:rPr>
-                  <a:t> </a:t>
-                </a:r>
-                <a:r>
-                  <a:rPr lang="ko-KR" altLang="en-US" sz="1400" dirty="0">
-                    <a:latin typeface="D2Coding" panose="020B0609020101020101" pitchFamily="49" charset="-127"/>
-                    <a:ea typeface="D2Coding" panose="020B0609020101020101" pitchFamily="49" charset="-127"/>
-                  </a:rPr>
-                  <a:t>연산 효율이 증가 </a:t>
-                </a:r>
-                <a:r>
-                  <a:rPr lang="en-US" altLang="ko-KR" sz="1400" dirty="0">
-                    <a:latin typeface="D2Coding" panose="020B0609020101020101" pitchFamily="49" charset="-127"/>
-                    <a:ea typeface="D2Coding" panose="020B0609020101020101" pitchFamily="49" charset="-127"/>
-                  </a:rPr>
-                  <a:t>(</a:t>
-                </a:r>
-                <a14:m>
-                  <m:oMath xmlns:m="http://schemas.openxmlformats.org/officeDocument/2006/math">
-                    <m:r>
-                      <a:rPr lang="en-US" altLang="ko-KR" sz="1400" i="1">
-                        <a:latin typeface="Cambria Math" panose="02040503050406030204" pitchFamily="18" charset="0"/>
-                      </a:rPr>
-                      <m:t>𝑁</m:t>
-                    </m:r>
-                  </m:oMath>
-                </a14:m>
-                <a:r>
-                  <a:rPr lang="en-US" altLang="ko-KR" sz="1400" dirty="0">
-                    <a:latin typeface="D2Coding" panose="020B0609020101020101" pitchFamily="49" charset="-127"/>
-                    <a:ea typeface="D2Coding" panose="020B0609020101020101" pitchFamily="49" charset="-127"/>
-                  </a:rPr>
-                  <a:t> </a:t>
-                </a:r>
-                <a:r>
-                  <a:rPr lang="en-US" altLang="ko-KR" sz="1400" dirty="0">
-                    <a:latin typeface="D2Coding" panose="020B0609020101020101" pitchFamily="49" charset="-127"/>
-                    <a:ea typeface="D2Coding" panose="020B0609020101020101" pitchFamily="49" charset="-127"/>
-                    <a:sym typeface="Wingdings" panose="05000000000000000000" pitchFamily="2" charset="2"/>
-                  </a:rPr>
-                  <a:t> </a:t>
-                </a:r>
-                <a14:m>
-                  <m:oMath xmlns:m="http://schemas.openxmlformats.org/officeDocument/2006/math">
-                    <m:func>
-                      <m:funcPr>
-                        <m:ctrlPr>
-                          <a:rPr lang="en-US" altLang="ko-KR" sz="1400" i="1">
-                            <a:latin typeface="Cambria Math" panose="02040503050406030204" pitchFamily="18" charset="0"/>
-                          </a:rPr>
-                        </m:ctrlPr>
-                      </m:funcPr>
-                      <m:fName>
-                        <m:sSub>
-                          <m:sSubPr>
-                            <m:ctrlPr>
-                              <a:rPr lang="en-US" altLang="ko-KR" sz="1400">
-                                <a:latin typeface="Cambria Math" panose="02040503050406030204" pitchFamily="18" charset="0"/>
-                              </a:rPr>
-                            </m:ctrlPr>
-                          </m:sSubPr>
-                          <m:e>
-                            <m:r>
-                              <m:rPr>
-                                <m:sty m:val="p"/>
-                              </m:rPr>
-                              <a:rPr lang="en-US" altLang="ko-KR" sz="1400">
-                                <a:latin typeface="Cambria Math" panose="02040503050406030204" pitchFamily="18" charset="0"/>
-                              </a:rPr>
-                              <m:t>log</m:t>
-                            </m:r>
-                          </m:e>
-                          <m:sub>
-                            <m:r>
-                              <a:rPr lang="en-US" altLang="ko-KR" sz="1400">
-                                <a:latin typeface="Cambria Math" panose="02040503050406030204" pitchFamily="18" charset="0"/>
-                              </a:rPr>
-                              <m:t>2</m:t>
-                            </m:r>
-                          </m:sub>
-                        </m:sSub>
-                      </m:fName>
-                      <m:e>
-                        <m:r>
-                          <a:rPr lang="en-US" altLang="ko-KR" sz="1400" i="1">
-                            <a:latin typeface="Cambria Math" panose="02040503050406030204" pitchFamily="18" charset="0"/>
-                          </a:rPr>
-                          <m:t>𝑁</m:t>
-                        </m:r>
-                      </m:e>
-                    </m:func>
-                  </m:oMath>
-                </a14:m>
-                <a:r>
-                  <a:rPr lang="en-US" altLang="ko-KR" sz="1400" dirty="0">
-                    <a:latin typeface="D2Coding" panose="020B0609020101020101" pitchFamily="49" charset="-127"/>
-                    <a:ea typeface="D2Coding" panose="020B0609020101020101" pitchFamily="49" charset="-127"/>
-                  </a:rPr>
-                  <a:t>)</a:t>
-                </a:r>
-                <a:endParaRPr lang="ko-KR" altLang="en-US" sz="1400" dirty="0">
-                  <a:latin typeface="D2Coding" panose="020B0609020101020101" pitchFamily="49" charset="-127"/>
-                  <a:ea typeface="D2Coding" panose="020B0609020101020101" pitchFamily="49" charset="-127"/>
-                </a:endParaRPr>
-              </a:p>
-            </p:txBody>
-          </p:sp>
-        </mc:Choice>
-        <mc:Fallback xmlns="">
-          <p:sp>
-            <p:nvSpPr>
-              <p:cNvPr id="10" name="TextBox 9">
-                <a:extLst>
-                  <a:ext uri="{FF2B5EF4-FFF2-40B4-BE49-F238E27FC236}">
-                    <a16:creationId xmlns:a16="http://schemas.microsoft.com/office/drawing/2014/main" id="{AB8C37FB-284E-EC98-BE38-02540B0599AA}"/>
-                  </a:ext>
-                </a:extLst>
-              </p:cNvPr>
-              <p:cNvSpPr txBox="1">
-                <a:spLocks noRot="1" noChangeAspect="1" noMove="1" noResize="1" noEditPoints="1" noAdjustHandles="1" noChangeArrowheads="1" noChangeShapeType="1" noTextEdit="1"/>
-              </p:cNvSpPr>
-              <p:nvPr/>
-            </p:nvSpPr>
-            <p:spPr>
-              <a:xfrm>
-                <a:off x="5391757" y="3935958"/>
-                <a:ext cx="6096000" cy="981166"/>
-              </a:xfrm>
-              <a:prstGeom prst="rect">
-                <a:avLst/>
-              </a:prstGeom>
-              <a:blipFill>
-                <a:blip r:embed="rId3"/>
-                <a:stretch>
-                  <a:fillRect l="-800" t="-3727" b="-4969"/>
-                </a:stretch>
-              </a:blipFill>
-            </p:spPr>
-            <p:txBody>
-              <a:bodyPr/>
-              <a:lstStyle/>
-              <a:p>
-                <a:r>
-                  <a:rPr lang="ko-KR" altLang="en-US">
-                    <a:noFill/>
-                  </a:rPr>
-                  <a:t> </a:t>
-                </a:r>
-              </a:p>
-            </p:txBody>
-          </p:sp>
-        </mc:Fallback>
-      </mc:AlternateContent>
-      <p:sp>
-        <p:nvSpPr>
-          <p:cNvPr id="2" name="슬라이드 번호 개체 틀 3">
-            <a:extLst>
-              <a:ext uri="{FF2B5EF4-FFF2-40B4-BE49-F238E27FC236}">
-                <a16:creationId xmlns:a16="http://schemas.microsoft.com/office/drawing/2014/main" id="{2182948B-6D90-FF71-6DFB-D937760CF354}"/>
-              </a:ext>
-            </a:extLst>
-          </p:cNvPr>
-          <p:cNvSpPr txBox="1">
-            <a:spLocks/>
-          </p:cNvSpPr>
-          <p:nvPr/>
-        </p:nvSpPr>
-        <p:spPr>
-          <a:xfrm>
-            <a:off x="11162230" y="299420"/>
-            <a:ext cx="753545" cy="365125"/>
-          </a:xfrm>
-          <a:prstGeom prst="rect">
-            <a:avLst/>
-          </a:prstGeom>
-        </p:spPr>
-        <p:txBody>
-          <a:bodyPr vert="horz" lIns="91440" tIns="45720" rIns="91440" bIns="45720" rtlCol="0" anchor="ctr"/>
-          <a:lstStyle>
-            <a:defPPr rtl="0">
-              <a:defRPr lang="ko-KR"/>
-            </a:defPPr>
-            <a:lvl1pPr marL="0" algn="r" defTabSz="914400" rtl="0" eaLnBrk="1" latinLnBrk="0" hangingPunct="1">
-              <a:defRPr sz="1200" kern="1200" baseline="0">
-                <a:solidFill>
-                  <a:schemeClr val="tx1">
-                    <a:lumMod val="65000"/>
-                    <a:lumOff val="35000"/>
-                  </a:schemeClr>
-                </a:solidFill>
-                <a:latin typeface="맑은 고딕" panose="020B0503020000020004" pitchFamily="50" charset="-127"/>
-                <a:ea typeface="맑은 고딕" panose="020B0503020000020004" pitchFamily="50" charset="-127"/>
-                <a:cs typeface="+mn-cs"/>
-              </a:defRPr>
-            </a:lvl1pPr>
-            <a:lvl2pPr marL="457200" algn="l" defTabSz="914400" rtl="0" eaLnBrk="1" latinLnBrk="0" hangingPunct="1">
-              <a:defRPr sz="1800" kern="1200">
-                <a:solidFill>
-                  <a:schemeClr val="tx1"/>
-                </a:solidFill>
-                <a:latin typeface="+mn-lt"/>
-                <a:ea typeface="+mn-ea"/>
-                <a:cs typeface="+mn-cs"/>
-              </a:defRPr>
-            </a:lvl2pPr>
-            <a:lvl3pPr marL="914400" algn="l" defTabSz="914400" rtl="0" eaLnBrk="1" latinLnBrk="0" hangingPunct="1">
-              <a:defRPr sz="1800" kern="1200">
-                <a:solidFill>
-                  <a:schemeClr val="tx1"/>
-                </a:solidFill>
-                <a:latin typeface="+mn-lt"/>
-                <a:ea typeface="+mn-ea"/>
-                <a:cs typeface="+mn-cs"/>
-              </a:defRPr>
-            </a:lvl3pPr>
-            <a:lvl4pPr marL="1371600" algn="l" defTabSz="914400" rtl="0" eaLnBrk="1" latinLnBrk="0" hangingPunct="1">
-              <a:defRPr sz="1800" kern="1200">
-                <a:solidFill>
-                  <a:schemeClr val="tx1"/>
-                </a:solidFill>
-                <a:latin typeface="+mn-lt"/>
-                <a:ea typeface="+mn-ea"/>
-                <a:cs typeface="+mn-cs"/>
-              </a:defRPr>
-            </a:lvl4pPr>
-            <a:lvl5pPr marL="1828800" algn="l" defTabSz="914400" rtl="0" eaLnBrk="1" latinLnBrk="0" hangingPunct="1">
-              <a:defRPr sz="1800" kern="1200">
-                <a:solidFill>
-                  <a:schemeClr val="tx1"/>
-                </a:solidFill>
-                <a:latin typeface="+mn-lt"/>
-                <a:ea typeface="+mn-ea"/>
-                <a:cs typeface="+mn-cs"/>
-              </a:defRPr>
-            </a:lvl5pPr>
-            <a:lvl6pPr marL="2286000" algn="l" defTabSz="914400" rtl="0" eaLnBrk="1" latinLnBrk="0" hangingPunct="1">
-              <a:defRPr sz="1800" kern="1200">
-                <a:solidFill>
-                  <a:schemeClr val="tx1"/>
-                </a:solidFill>
-                <a:latin typeface="+mn-lt"/>
-                <a:ea typeface="+mn-ea"/>
-                <a:cs typeface="+mn-cs"/>
-              </a:defRPr>
-            </a:lvl6pPr>
-            <a:lvl7pPr marL="2743200" algn="l" defTabSz="914400" rtl="0" eaLnBrk="1" latinLnBrk="0" hangingPunct="1">
-              <a:defRPr sz="1800" kern="1200">
-                <a:solidFill>
-                  <a:schemeClr val="tx1"/>
-                </a:solidFill>
-                <a:latin typeface="+mn-lt"/>
-                <a:ea typeface="+mn-ea"/>
-                <a:cs typeface="+mn-cs"/>
-              </a:defRPr>
-            </a:lvl7pPr>
-            <a:lvl8pPr marL="3200400" algn="l" defTabSz="914400" rtl="0" eaLnBrk="1" latinLnBrk="0" hangingPunct="1">
-              <a:defRPr sz="1800" kern="1200">
-                <a:solidFill>
-                  <a:schemeClr val="tx1"/>
-                </a:solidFill>
-                <a:latin typeface="+mn-lt"/>
-                <a:ea typeface="+mn-ea"/>
-                <a:cs typeface="+mn-cs"/>
-              </a:defRPr>
-            </a:lvl8pPr>
-            <a:lvl9pPr marL="3657600" algn="l" defTabSz="914400" rtl="0" eaLnBrk="1" latinLnBrk="0" hangingPunct="1">
-              <a:defRPr sz="1800" kern="1200">
-                <a:solidFill>
-                  <a:schemeClr val="tx1"/>
-                </a:solidFill>
-                <a:latin typeface="+mn-lt"/>
-                <a:ea typeface="+mn-ea"/>
-                <a:cs typeface="+mn-cs"/>
-              </a:defRPr>
-            </a:lvl9pPr>
-          </a:lstStyle>
-          <a:p>
-            <a:fld id="{D57F1E4F-1CFF-5643-939E-217C01CDF565}" type="slidenum">
-              <a:rPr lang="en-US" b="1" smtClean="0"/>
-              <a:pPr/>
-              <a:t>4</a:t>
-            </a:fld>
-            <a:endParaRPr lang="en-US" b="1" dirty="0"/>
-          </a:p>
-        </p:txBody>
-      </p:sp>
-    </p:spTree>
-    <p:extLst>
-      <p:ext uri="{BB962C8B-B14F-4D97-AF65-F5344CB8AC3E}">
-        <p14:creationId xmlns:p14="http://schemas.microsoft.com/office/powerpoint/2010/main" val="2790759993"/>
-      </p:ext>
-    </p:extLst>
-  </p:cSld>
-  <p:clrMapOvr>
-    <a:masterClrMapping/>
-  </p:clrMapOvr>
-</p:sld>
-</file>
-
-<file path=ppt/slides/slide5.xml><?xml version="1.0" encoding="utf-8"?>
-<p:sld xmlns:a="http://schemas.openxmlformats.org/drawingml/2006/main" xmlns:r="http://schemas.openxmlformats.org/officeDocument/2006/relationships" xmlns:p="http://schemas.openxmlformats.org/presentationml/2006/main">
-  <p:cSld>
-    <p:spTree>
-      <p:nvGrpSpPr>
-        <p:cNvPr id="1" name="">
-          <a:extLst>
-            <a:ext uri="{FF2B5EF4-FFF2-40B4-BE49-F238E27FC236}">
               <a16:creationId xmlns:a16="http://schemas.microsoft.com/office/drawing/2014/main" id="{322750F7-41AF-AE88-E1DC-B4511268E4EC}"/>
             </a:ext>
           </a:extLst>
@@ -13129,7 +13245,7 @@
             <a:fld id="{D57F1E4F-1CFF-5643-939E-217C01CDF565}" type="slidenum">
               <a:rPr lang="en-US" b="1" smtClean="0"/>
               <a:pPr/>
-              <a:t>5</a:t>
+              <a:t>4</a:t>
             </a:fld>
             <a:endParaRPr lang="en-US" b="1" dirty="0"/>
           </a:p>
@@ -13148,7 +13264,7 @@
 </p:sld>
 </file>
 
-<file path=ppt/slides/slide6.xml><?xml version="1.0" encoding="utf-8"?>
+<file path=ppt/slides/slide5.xml><?xml version="1.0" encoding="utf-8"?>
 <p:sld xmlns:a="http://schemas.openxmlformats.org/drawingml/2006/main" xmlns:r="http://schemas.openxmlformats.org/officeDocument/2006/relationships" xmlns:p="http://schemas.openxmlformats.org/presentationml/2006/main">
   <p:cSld>
     <p:spTree>
@@ -14606,7 +14722,7 @@
             <a:fld id="{D57F1E4F-1CFF-5643-939E-217C01CDF565}" type="slidenum">
               <a:rPr lang="en-US" b="1" smtClean="0"/>
               <a:pPr/>
-              <a:t>6</a:t>
+              <a:t>5</a:t>
             </a:fld>
             <a:endParaRPr lang="en-US" b="1" dirty="0"/>
           </a:p>
@@ -14625,7 +14741,7 @@
 </p:sld>
 </file>
 
-<file path=ppt/slides/slide7.xml><?xml version="1.0" encoding="utf-8"?>
+<file path=ppt/slides/slide6.xml><?xml version="1.0" encoding="utf-8"?>
 <p:sld xmlns:a="http://schemas.openxmlformats.org/drawingml/2006/main" xmlns:r="http://schemas.openxmlformats.org/officeDocument/2006/relationships" xmlns:p="http://schemas.openxmlformats.org/presentationml/2006/main">
   <p:cSld>
     <p:spTree>
@@ -14768,14 +14884,16 @@
         <p:spPr>
           <a:xfrm>
             <a:off x="6638925" y="1690133"/>
-            <a:ext cx="5183620" cy="4339650"/>
+            <a:ext cx="5183620" cy="4616648"/>
           </a:xfrm>
           <a:prstGeom prst="rect">
             <a:avLst/>
           </a:prstGeom>
           <a:noFill/>
           <a:ln>
-            <a:noFill/>
+            <a:solidFill>
+              <a:schemeClr val="tx1"/>
+            </a:solidFill>
             <a:prstDash val="dash"/>
           </a:ln>
         </p:spPr>
@@ -15033,41 +15151,61 @@
               <a:t>?</a:t>
             </a:r>
             <a:r>
-              <a:rPr lang="ko-KR" altLang="ko-KR" sz="1200" dirty="0"/>
+              <a:rPr lang="ko-KR" altLang="ko-KR" sz="1400" dirty="0">
+                <a:latin typeface="D2Coding" panose="020B0609020101020101" pitchFamily="49" charset="-127"/>
+                <a:ea typeface="D2Coding" panose="020B0609020101020101" pitchFamily="49" charset="-127"/>
+              </a:rPr>
               <a:t>AI 모델에게 '가장 정확하고, 연관성이 높으며, 깔끔하게 정리된 핵심 </a:t>
             </a:r>
             <a:r>
-              <a:rPr lang="ko-KR" altLang="ko-KR" sz="1200" dirty="0" err="1"/>
+              <a:rPr lang="ko-KR" altLang="ko-KR" sz="1400" dirty="0" err="1">
+                <a:latin typeface="D2Coding" panose="020B0609020101020101" pitchFamily="49" charset="-127"/>
+                <a:ea typeface="D2Coding" panose="020B0609020101020101" pitchFamily="49" charset="-127"/>
+              </a:rPr>
               <a:t>정보'만을</a:t>
             </a:r>
             <a:r>
-              <a:rPr lang="ko-KR" altLang="ko-KR" sz="1200" dirty="0"/>
+              <a:rPr lang="ko-KR" altLang="ko-KR" sz="1400" dirty="0">
+                <a:latin typeface="D2Coding" panose="020B0609020101020101" pitchFamily="49" charset="-127"/>
+                <a:ea typeface="D2Coding" panose="020B0609020101020101" pitchFamily="49" charset="-127"/>
+              </a:rPr>
               <a:t> </a:t>
             </a:r>
             <a:r>
-              <a:rPr lang="ko-KR" altLang="en-US" sz="1200" dirty="0"/>
+              <a:rPr lang="ko-KR" altLang="en-US" sz="1400" dirty="0">
+                <a:latin typeface="D2Coding" panose="020B0609020101020101" pitchFamily="49" charset="-127"/>
+                <a:ea typeface="D2Coding" panose="020B0609020101020101" pitchFamily="49" charset="-127"/>
+              </a:rPr>
               <a:t>주고</a:t>
             </a:r>
             <a:r>
-              <a:rPr lang="ko-KR" altLang="ko-KR" sz="1200" dirty="0"/>
+              <a:rPr lang="ko-KR" altLang="ko-KR" sz="1400" dirty="0">
+                <a:latin typeface="D2Coding" panose="020B0609020101020101" pitchFamily="49" charset="-127"/>
+                <a:ea typeface="D2Coding" panose="020B0609020101020101" pitchFamily="49" charset="-127"/>
+              </a:rPr>
               <a:t>, 결과적으로 </a:t>
             </a:r>
             <a:r>
-              <a:rPr lang="ko-KR" altLang="ko-KR" sz="1200" dirty="0" err="1"/>
+              <a:rPr lang="ko-KR" altLang="ko-KR" sz="1400" dirty="0" err="1">
+                <a:latin typeface="D2Coding" panose="020B0609020101020101" pitchFamily="49" charset="-127"/>
+                <a:ea typeface="D2Coding" panose="020B0609020101020101" pitchFamily="49" charset="-127"/>
+              </a:rPr>
               <a:t>AI가</a:t>
             </a:r>
             <a:r>
-              <a:rPr lang="ko-KR" altLang="ko-KR" sz="1200" dirty="0"/>
+              <a:rPr lang="ko-KR" altLang="ko-KR" sz="1400" dirty="0">
+                <a:latin typeface="D2Coding" panose="020B0609020101020101" pitchFamily="49" charset="-127"/>
+                <a:ea typeface="D2Coding" panose="020B0609020101020101" pitchFamily="49" charset="-127"/>
+              </a:rPr>
               <a:t> 사용자에게 매우 정확한 최종 답변을 생성하도록 유도</a:t>
             </a:r>
             <a:r>
-              <a:rPr lang="ko-KR" altLang="en-US" sz="1200" dirty="0"/>
+              <a:rPr lang="ko-KR" altLang="en-US" sz="1400" dirty="0">
+                <a:latin typeface="D2Coding" panose="020B0609020101020101" pitchFamily="49" charset="-127"/>
+                <a:ea typeface="D2Coding" panose="020B0609020101020101" pitchFamily="49" charset="-127"/>
+              </a:rPr>
               <a:t>）</a:t>
             </a:r>
-            <a:endParaRPr lang="ko-KR" altLang="en-US" sz="1400" dirty="0">
-              <a:latin typeface="D2Coding" panose="020B0609020101020101" pitchFamily="49" charset="-127"/>
-              <a:ea typeface="D2Coding" panose="020B0609020101020101" pitchFamily="49" charset="-127"/>
-            </a:endParaRPr>
           </a:p>
         </p:txBody>
       </p:sp>
@@ -15198,7 +15336,7 @@
             <a:fld id="{D57F1E4F-1CFF-5643-939E-217C01CDF565}" type="slidenum">
               <a:rPr lang="en-US" b="1" smtClean="0"/>
               <a:pPr/>
-              <a:t>7</a:t>
+              <a:t>6</a:t>
             </a:fld>
             <a:endParaRPr lang="en-US" b="1" dirty="0"/>
           </a:p>
@@ -15388,6 +15526,733 @@
     <p:extLst>
       <p:ext uri="{BB962C8B-B14F-4D97-AF65-F5344CB8AC3E}">
         <p14:creationId xmlns:p14="http://schemas.microsoft.com/office/powerpoint/2010/main" val="1065848431"/>
+      </p:ext>
+    </p:extLst>
+  </p:cSld>
+  <p:clrMapOvr>
+    <a:masterClrMapping/>
+  </p:clrMapOvr>
+</p:sld>
+</file>
+
+<file path=ppt/slides/slide7.xml><?xml version="1.0" encoding="utf-8"?>
+<p:sld xmlns:a="http://schemas.openxmlformats.org/drawingml/2006/main" xmlns:r="http://schemas.openxmlformats.org/officeDocument/2006/relationships" xmlns:p="http://schemas.openxmlformats.org/presentationml/2006/main">
+  <p:cSld>
+    <p:spTree>
+      <p:nvGrpSpPr>
+        <p:cNvPr id="1" name="">
+          <a:extLst>
+            <a:ext uri="{FF2B5EF4-FFF2-40B4-BE49-F238E27FC236}">
+              <a16:creationId xmlns:a16="http://schemas.microsoft.com/office/drawing/2014/main" id="{B948372F-584A-3720-5EA3-5BC174A41D4B}"/>
+            </a:ext>
+          </a:extLst>
+        </p:cNvPr>
+        <p:cNvGrpSpPr/>
+        <p:nvPr/>
+      </p:nvGrpSpPr>
+      <p:grpSpPr>
+        <a:xfrm>
+          <a:off x="0" y="0"/>
+          <a:ext cx="0" cy="0"/>
+          <a:chOff x="0" y="0"/>
+          <a:chExt cx="0" cy="0"/>
+        </a:xfrm>
+      </p:grpSpPr>
+      <p:sp>
+        <p:nvSpPr>
+          <p:cNvPr id="3" name="제목 1">
+            <a:extLst>
+              <a:ext uri="{FF2B5EF4-FFF2-40B4-BE49-F238E27FC236}">
+                <a16:creationId xmlns:a16="http://schemas.microsoft.com/office/drawing/2014/main" id="{DFD712C7-88FF-B03C-0041-0910E14CF15B}"/>
+              </a:ext>
+            </a:extLst>
+          </p:cNvPr>
+          <p:cNvSpPr txBox="1">
+            <a:spLocks/>
+          </p:cNvSpPr>
+          <p:nvPr/>
+        </p:nvSpPr>
+        <p:spPr>
+          <a:xfrm>
+            <a:off x="475645" y="481983"/>
+            <a:ext cx="10353762" cy="766439"/>
+          </a:xfrm>
+          <a:prstGeom prst="rect">
+            <a:avLst/>
+          </a:prstGeom>
+        </p:spPr>
+        <p:txBody>
+          <a:bodyPr vert="horz" lIns="91440" tIns="45720" rIns="91440" bIns="45720" rtlCol="0" anchor="ctr">
+            <a:normAutofit/>
+          </a:bodyPr>
+          <a:lstStyle>
+            <a:lvl1pPr algn="ctr" defTabSz="914400" rtl="0" eaLnBrk="1" latinLnBrk="1" hangingPunct="1">
+              <a:lnSpc>
+                <a:spcPct val="90000"/>
+              </a:lnSpc>
+              <a:spcBef>
+                <a:spcPct val="0"/>
+              </a:spcBef>
+              <a:buNone/>
+              <a:defRPr sz="3200" kern="1200" cap="all" baseline="0">
+                <a:solidFill>
+                  <a:schemeClr val="tx1"/>
+                </a:solidFill>
+                <a:effectLst/>
+                <a:latin typeface="Batang" panose="02030600000101010101" pitchFamily="18" charset="-127"/>
+                <a:ea typeface="Batang" panose="02030600000101010101" pitchFamily="18" charset="-127"/>
+                <a:cs typeface="+mj-cs"/>
+              </a:defRPr>
+            </a:lvl1pPr>
+          </a:lstStyle>
+          <a:p>
+            <a:pPr algn="l"/>
+            <a:r>
+              <a:rPr lang="en-US" altLang="ko-KR" sz="2800" cap="none" dirty="0">
+                <a:solidFill>
+                  <a:schemeClr val="bg2">
+                    <a:lumMod val="25000"/>
+                  </a:schemeClr>
+                </a:solidFill>
+                <a:latin typeface="D2Coding" panose="020B0609020101020101" pitchFamily="49" charset="-127"/>
+                <a:ea typeface="D2Coding" panose="020B0609020101020101" pitchFamily="49" charset="-127"/>
+                <a:cs typeface="Segoe UI Light" panose="020B0502040204020203" pitchFamily="34" charset="0"/>
+              </a:rPr>
+              <a:t>Indexing &amp; Search the Vector DB</a:t>
+            </a:r>
+            <a:endParaRPr lang="ko-KR" altLang="en-US" sz="2800" cap="none" dirty="0">
+              <a:solidFill>
+                <a:schemeClr val="bg2">
+                  <a:lumMod val="25000"/>
+                </a:schemeClr>
+              </a:solidFill>
+              <a:latin typeface="D2Coding" panose="020B0609020101020101" pitchFamily="49" charset="-127"/>
+              <a:ea typeface="D2Coding" panose="020B0609020101020101" pitchFamily="49" charset="-127"/>
+              <a:cs typeface="Segoe UI Light" panose="020B0502040204020203" pitchFamily="34" charset="0"/>
+            </a:endParaRPr>
+          </a:p>
+        </p:txBody>
+      </p:sp>
+      <p:pic>
+        <p:nvPicPr>
+          <p:cNvPr id="5" name="그림 4">
+            <a:extLst>
+              <a:ext uri="{FF2B5EF4-FFF2-40B4-BE49-F238E27FC236}">
+                <a16:creationId xmlns:a16="http://schemas.microsoft.com/office/drawing/2014/main" id="{7C66EEA0-1F46-6B06-7214-66461A6330BD}"/>
+              </a:ext>
+            </a:extLst>
+          </p:cNvPr>
+          <p:cNvPicPr>
+            <a:picLocks noChangeAspect="1"/>
+          </p:cNvPicPr>
+          <p:nvPr/>
+        </p:nvPicPr>
+        <p:blipFill>
+          <a:blip r:embed="rId2"/>
+          <a:stretch>
+            <a:fillRect/>
+          </a:stretch>
+        </p:blipFill>
+        <p:spPr>
+          <a:xfrm>
+            <a:off x="628652" y="1355281"/>
+            <a:ext cx="4331276" cy="5048884"/>
+          </a:xfrm>
+          <a:prstGeom prst="rect">
+            <a:avLst/>
+          </a:prstGeom>
+          <a:ln>
+            <a:solidFill>
+              <a:schemeClr val="tx1"/>
+            </a:solidFill>
+          </a:ln>
+        </p:spPr>
+      </p:pic>
+      <p:sp>
+        <p:nvSpPr>
+          <p:cNvPr id="8" name="TextBox 7">
+            <a:extLst>
+              <a:ext uri="{FF2B5EF4-FFF2-40B4-BE49-F238E27FC236}">
+                <a16:creationId xmlns:a16="http://schemas.microsoft.com/office/drawing/2014/main" id="{D5D42372-0CC1-F607-2405-C7C478F4983B}"/>
+              </a:ext>
+            </a:extLst>
+          </p:cNvPr>
+          <p:cNvSpPr txBox="1"/>
+          <p:nvPr/>
+        </p:nvSpPr>
+        <p:spPr>
+          <a:xfrm>
+            <a:off x="5160847" y="1595429"/>
+            <a:ext cx="6234542" cy="1531830"/>
+          </a:xfrm>
+          <a:prstGeom prst="rect">
+            <a:avLst/>
+          </a:prstGeom>
+          <a:noFill/>
+          <a:ln>
+            <a:solidFill>
+              <a:schemeClr val="tx1"/>
+            </a:solidFill>
+            <a:prstDash val="dash"/>
+          </a:ln>
+        </p:spPr>
+        <p:txBody>
+          <a:bodyPr wrap="square">
+            <a:spAutoFit/>
+          </a:bodyPr>
+          <a:lstStyle/>
+          <a:p>
+            <a:pPr>
+              <a:lnSpc>
+                <a:spcPct val="150000"/>
+              </a:lnSpc>
+            </a:pPr>
+            <a:r>
+              <a:rPr lang="en-US" altLang="ko-KR" sz="1600" dirty="0">
+                <a:latin typeface="D2Coding" panose="020B0609020101020101" pitchFamily="49" charset="-127"/>
+                <a:ea typeface="D2Coding" panose="020B0609020101020101" pitchFamily="49" charset="-127"/>
+              </a:rPr>
+              <a:t>An example flow of indexing documents alongside retrieval of relevant documents from a vector store; the Hierarchical Navigable Small World (HNSW) box depicts calculating similarity of documents against the user’s query</a:t>
+            </a:r>
+            <a:endParaRPr lang="ko-KR" altLang="en-US" sz="1600" dirty="0">
+              <a:latin typeface="D2Coding" panose="020B0609020101020101" pitchFamily="49" charset="-127"/>
+              <a:ea typeface="D2Coding" panose="020B0609020101020101" pitchFamily="49" charset="-127"/>
+            </a:endParaRPr>
+          </a:p>
+        </p:txBody>
+      </p:sp>
+      <mc:AlternateContent xmlns:mc="http://schemas.openxmlformats.org/markup-compatibility/2006">
+        <mc:Choice xmlns:a14="http://schemas.microsoft.com/office/drawing/2010/main" Requires="a14">
+          <p:sp>
+            <p:nvSpPr>
+              <p:cNvPr id="10" name="TextBox 9">
+                <a:extLst>
+                  <a:ext uri="{FF2B5EF4-FFF2-40B4-BE49-F238E27FC236}">
+                    <a16:creationId xmlns:a16="http://schemas.microsoft.com/office/drawing/2014/main" id="{AB8C37FB-284E-EC98-BE38-02540B0599AA}"/>
+                  </a:ext>
+                </a:extLst>
+              </p:cNvPr>
+              <p:cNvSpPr txBox="1"/>
+              <p:nvPr/>
+            </p:nvSpPr>
+            <p:spPr>
+              <a:xfrm>
+                <a:off x="5160847" y="3920062"/>
+                <a:ext cx="6326909" cy="1767472"/>
+              </a:xfrm>
+              <a:prstGeom prst="rect">
+                <a:avLst/>
+              </a:prstGeom>
+              <a:noFill/>
+              <a:ln>
+                <a:solidFill>
+                  <a:schemeClr val="tx1"/>
+                </a:solidFill>
+              </a:ln>
+            </p:spPr>
+            <p:txBody>
+              <a:bodyPr wrap="square">
+                <a:spAutoFit/>
+              </a:bodyPr>
+              <a:lstStyle/>
+              <a:p>
+                <a:pPr>
+                  <a:lnSpc>
+                    <a:spcPct val="150000"/>
+                  </a:lnSpc>
+                </a:pPr>
+                <a:r>
+                  <a:rPr lang="en-US" altLang="ko-KR" sz="1800" dirty="0">
+                    <a:latin typeface="D2Coding" panose="020B0609020101020101" pitchFamily="49" charset="-127"/>
+                    <a:ea typeface="D2Coding" panose="020B0609020101020101" pitchFamily="49" charset="-127"/>
+                  </a:rPr>
+                  <a:t>Hierarchical Navigable Small World (HNSW)</a:t>
+                </a:r>
+              </a:p>
+              <a:p>
+                <a:pPr marL="285750" indent="-285750">
+                  <a:lnSpc>
+                    <a:spcPct val="150000"/>
+                  </a:lnSpc>
+                  <a:buFont typeface="Wingdings" panose="05000000000000000000" pitchFamily="2" charset="2"/>
+                  <a:buChar char="§"/>
+                </a:pPr>
+                <a:r>
+                  <a:rPr lang="en-US" altLang="ko-KR" sz="1400" dirty="0">
+                    <a:latin typeface="D2Coding" panose="020B0609020101020101" pitchFamily="49" charset="-127"/>
+                    <a:ea typeface="D2Coding" panose="020B0609020101020101" pitchFamily="49" charset="-127"/>
+                  </a:rPr>
+                  <a:t>RDBMS</a:t>
+                </a:r>
+                <a:r>
+                  <a:rPr lang="ko-KR" altLang="en-US" sz="1400" dirty="0">
+                    <a:latin typeface="D2Coding" panose="020B0609020101020101" pitchFamily="49" charset="-127"/>
+                    <a:ea typeface="D2Coding" panose="020B0609020101020101" pitchFamily="49" charset="-127"/>
+                  </a:rPr>
+                  <a:t>의 </a:t>
+                </a:r>
+                <a:r>
+                  <a:rPr lang="en-US" altLang="ko-KR" sz="1400" dirty="0" err="1">
+                    <a:latin typeface="D2Coding" panose="020B0609020101020101" pitchFamily="49" charset="-127"/>
+                    <a:ea typeface="D2Coding" panose="020B0609020101020101" pitchFamily="49" charset="-127"/>
+                  </a:rPr>
+                  <a:t>B+Tree</a:t>
+                </a:r>
+                <a:r>
+                  <a:rPr lang="en-US" altLang="ko-KR" sz="1400" dirty="0">
+                    <a:latin typeface="D2Coding" panose="020B0609020101020101" pitchFamily="49" charset="-127"/>
+                    <a:ea typeface="D2Coding" panose="020B0609020101020101" pitchFamily="49" charset="-127"/>
+                  </a:rPr>
+                  <a:t> </a:t>
+                </a:r>
+                <a:r>
+                  <a:rPr lang="ko-KR" altLang="en-US" sz="1400" dirty="0">
+                    <a:latin typeface="D2Coding" panose="020B0609020101020101" pitchFamily="49" charset="-127"/>
+                    <a:ea typeface="D2Coding" panose="020B0609020101020101" pitchFamily="49" charset="-127"/>
+                  </a:rPr>
+                  <a:t>알고리즘과 유사</a:t>
+                </a:r>
+                <a:r>
+                  <a:rPr lang="en-US" altLang="ko-KR" sz="1400" dirty="0">
+                    <a:latin typeface="D2Coding" panose="020B0609020101020101" pitchFamily="49" charset="-127"/>
+                    <a:ea typeface="D2Coding" panose="020B0609020101020101" pitchFamily="49" charset="-127"/>
+                  </a:rPr>
+                  <a:t> : </a:t>
+                </a:r>
+                <a:r>
+                  <a:rPr lang="ko-KR" altLang="en-US" sz="1400" dirty="0">
+                    <a:latin typeface="D2Coding" panose="020B0609020101020101" pitchFamily="49" charset="-127"/>
+                    <a:ea typeface="D2Coding" panose="020B0609020101020101" pitchFamily="49" charset="-127"/>
+                  </a:rPr>
+                  <a:t>새로운 </a:t>
+                </a:r>
+                <a:r>
+                  <a:rPr lang="en-US" altLang="ko-KR" sz="1400" dirty="0">
+                    <a:latin typeface="D2Coding" panose="020B0609020101020101" pitchFamily="49" charset="-127"/>
+                    <a:ea typeface="D2Coding" panose="020B0609020101020101" pitchFamily="49" charset="-127"/>
+                  </a:rPr>
+                  <a:t>query</a:t>
+                </a:r>
+                <a:r>
+                  <a:rPr lang="ko-KR" altLang="en-US" sz="1400" dirty="0">
+                    <a:latin typeface="D2Coding" panose="020B0609020101020101" pitchFamily="49" charset="-127"/>
+                    <a:ea typeface="D2Coding" panose="020B0609020101020101" pitchFamily="49" charset="-127"/>
+                  </a:rPr>
+                  <a:t>에 대해 </a:t>
+                </a:r>
+                <a:r>
+                  <a:rPr lang="en-US" altLang="ko-KR" sz="1400" dirty="0">
+                    <a:latin typeface="D2Coding" panose="020B0609020101020101" pitchFamily="49" charset="-127"/>
+                    <a:ea typeface="D2Coding" panose="020B0609020101020101" pitchFamily="49" charset="-127"/>
+                  </a:rPr>
+                  <a:t>N</a:t>
+                </a:r>
+                <a:r>
+                  <a:rPr lang="ko-KR" altLang="en-US" sz="1400" dirty="0">
+                    <a:latin typeface="D2Coding" panose="020B0609020101020101" pitchFamily="49" charset="-127"/>
+                    <a:ea typeface="D2Coding" panose="020B0609020101020101" pitchFamily="49" charset="-127"/>
+                  </a:rPr>
+                  <a:t>개의 </a:t>
+                </a:r>
+                <a:r>
+                  <a:rPr lang="en-US" altLang="ko-KR" sz="1400" dirty="0">
+                    <a:latin typeface="D2Coding" panose="020B0609020101020101" pitchFamily="49" charset="-127"/>
+                    <a:ea typeface="D2Coding" panose="020B0609020101020101" pitchFamily="49" charset="-127"/>
+                  </a:rPr>
+                  <a:t>vectors</a:t>
+                </a:r>
+                <a:r>
+                  <a:rPr lang="ko-KR" altLang="en-US" sz="1400" dirty="0">
+                    <a:latin typeface="D2Coding" panose="020B0609020101020101" pitchFamily="49" charset="-127"/>
+                    <a:ea typeface="D2Coding" panose="020B0609020101020101" pitchFamily="49" charset="-127"/>
+                  </a:rPr>
+                  <a:t>를 대상으로 검색 시 연산 효율이 증가 </a:t>
+                </a:r>
+                <a:r>
+                  <a:rPr lang="en-US" altLang="ko-KR" sz="1400" dirty="0">
+                    <a:latin typeface="D2Coding" panose="020B0609020101020101" pitchFamily="49" charset="-127"/>
+                    <a:ea typeface="D2Coding" panose="020B0609020101020101" pitchFamily="49" charset="-127"/>
+                  </a:rPr>
+                  <a:t>(</a:t>
+                </a:r>
+                <a14:m>
+                  <m:oMath xmlns:m="http://schemas.openxmlformats.org/officeDocument/2006/math">
+                    <m:r>
+                      <a:rPr lang="en-US" altLang="ko-KR" sz="1400" i="1">
+                        <a:latin typeface="Cambria Math" panose="02040503050406030204" pitchFamily="18" charset="0"/>
+                      </a:rPr>
+                      <m:t>𝑁</m:t>
+                    </m:r>
+                  </m:oMath>
+                </a14:m>
+                <a:r>
+                  <a:rPr lang="en-US" altLang="ko-KR" sz="1400" dirty="0">
+                    <a:latin typeface="D2Coding" panose="020B0609020101020101" pitchFamily="49" charset="-127"/>
+                    <a:ea typeface="D2Coding" panose="020B0609020101020101" pitchFamily="49" charset="-127"/>
+                  </a:rPr>
+                  <a:t> </a:t>
+                </a:r>
+                <a:r>
+                  <a:rPr lang="en-US" altLang="ko-KR" sz="1400" dirty="0">
+                    <a:latin typeface="D2Coding" panose="020B0609020101020101" pitchFamily="49" charset="-127"/>
+                    <a:ea typeface="D2Coding" panose="020B0609020101020101" pitchFamily="49" charset="-127"/>
+                    <a:sym typeface="Wingdings" panose="05000000000000000000" pitchFamily="2" charset="2"/>
+                  </a:rPr>
+                  <a:t> </a:t>
+                </a:r>
+                <a14:m>
+                  <m:oMath xmlns:m="http://schemas.openxmlformats.org/officeDocument/2006/math">
+                    <m:func>
+                      <m:funcPr>
+                        <m:ctrlPr>
+                          <a:rPr lang="en-US" altLang="ko-KR" sz="1400" i="1">
+                            <a:latin typeface="Cambria Math" panose="02040503050406030204" pitchFamily="18" charset="0"/>
+                          </a:rPr>
+                        </m:ctrlPr>
+                      </m:funcPr>
+                      <m:fName>
+                        <m:sSub>
+                          <m:sSubPr>
+                            <m:ctrlPr>
+                              <a:rPr lang="en-US" altLang="ko-KR" sz="1400">
+                                <a:latin typeface="Cambria Math" panose="02040503050406030204" pitchFamily="18" charset="0"/>
+                              </a:rPr>
+                            </m:ctrlPr>
+                          </m:sSubPr>
+                          <m:e>
+                            <m:r>
+                              <m:rPr>
+                                <m:sty m:val="p"/>
+                              </m:rPr>
+                              <a:rPr lang="en-US" altLang="ko-KR" sz="1400">
+                                <a:latin typeface="Cambria Math" panose="02040503050406030204" pitchFamily="18" charset="0"/>
+                              </a:rPr>
+                              <m:t>log</m:t>
+                            </m:r>
+                          </m:e>
+                          <m:sub>
+                            <m:r>
+                              <a:rPr lang="en-US" altLang="ko-KR" sz="1400">
+                                <a:latin typeface="Cambria Math" panose="02040503050406030204" pitchFamily="18" charset="0"/>
+                              </a:rPr>
+                              <m:t>2</m:t>
+                            </m:r>
+                          </m:sub>
+                        </m:sSub>
+                      </m:fName>
+                      <m:e>
+                        <m:r>
+                          <a:rPr lang="en-US" altLang="ko-KR" sz="1400" i="1">
+                            <a:latin typeface="Cambria Math" panose="02040503050406030204" pitchFamily="18" charset="0"/>
+                          </a:rPr>
+                          <m:t>𝑁</m:t>
+                        </m:r>
+                      </m:e>
+                    </m:func>
+                  </m:oMath>
+                </a14:m>
+                <a:r>
+                  <a:rPr lang="en-US" altLang="ko-KR" sz="1400" dirty="0">
+                    <a:latin typeface="D2Coding" panose="020B0609020101020101" pitchFamily="49" charset="-127"/>
+                    <a:ea typeface="D2Coding" panose="020B0609020101020101" pitchFamily="49" charset="-127"/>
+                  </a:rPr>
+                  <a:t>)</a:t>
+                </a:r>
+              </a:p>
+              <a:p>
+                <a:pPr marL="285750" indent="-285750">
+                  <a:lnSpc>
+                    <a:spcPct val="150000"/>
+                  </a:lnSpc>
+                  <a:buFont typeface="Wingdings" panose="05000000000000000000" pitchFamily="2" charset="2"/>
+                  <a:buChar char="§"/>
+                </a:pPr>
+                <a:r>
+                  <a:rPr lang="ko-KR" altLang="ko-KR" sz="1400" dirty="0">
+                    <a:latin typeface="D2Coding" panose="020B0609020101020101" pitchFamily="49" charset="-127"/>
+                    <a:ea typeface="D2Coding" panose="020B0609020101020101" pitchFamily="49" charset="-127"/>
+                  </a:rPr>
+                  <a:t>벡터 데이터베이스(</a:t>
+                </a:r>
+                <a:r>
+                  <a:rPr lang="ko-KR" altLang="ko-KR" sz="1400" dirty="0" err="1">
+                    <a:latin typeface="D2Coding" panose="020B0609020101020101" pitchFamily="49" charset="-127"/>
+                    <a:ea typeface="D2Coding" panose="020B0609020101020101" pitchFamily="49" charset="-127"/>
+                  </a:rPr>
+                  <a:t>Vector</a:t>
+                </a:r>
+                <a:r>
+                  <a:rPr lang="ko-KR" altLang="ko-KR" sz="1400" dirty="0">
+                    <a:latin typeface="D2Coding" panose="020B0609020101020101" pitchFamily="49" charset="-127"/>
+                    <a:ea typeface="D2Coding" panose="020B0609020101020101" pitchFamily="49" charset="-127"/>
+                  </a:rPr>
+                  <a:t> DB): </a:t>
+                </a:r>
+                <a:r>
+                  <a:rPr lang="ko-KR" altLang="ko-KR" sz="1400" dirty="0" err="1">
+                    <a:latin typeface="D2Coding" panose="020B0609020101020101" pitchFamily="49" charset="-127"/>
+                    <a:ea typeface="D2Coding" panose="020B0609020101020101" pitchFamily="49" charset="-127"/>
+                  </a:rPr>
+                  <a:t>Milvus</a:t>
+                </a:r>
+                <a:r>
+                  <a:rPr lang="ko-KR" altLang="ko-KR" sz="1400" dirty="0">
+                    <a:latin typeface="D2Coding" panose="020B0609020101020101" pitchFamily="49" charset="-127"/>
+                    <a:ea typeface="D2Coding" panose="020B0609020101020101" pitchFamily="49" charset="-127"/>
+                  </a:rPr>
+                  <a:t>, </a:t>
+                </a:r>
+                <a:r>
+                  <a:rPr lang="ko-KR" altLang="ko-KR" sz="1400" dirty="0" err="1">
+                    <a:latin typeface="D2Coding" panose="020B0609020101020101" pitchFamily="49" charset="-127"/>
+                    <a:ea typeface="D2Coding" panose="020B0609020101020101" pitchFamily="49" charset="-127"/>
+                  </a:rPr>
+                  <a:t>Pinecone</a:t>
+                </a:r>
+                <a:r>
+                  <a:rPr lang="ko-KR" altLang="ko-KR" sz="1400" dirty="0">
+                    <a:latin typeface="D2Coding" panose="020B0609020101020101" pitchFamily="49" charset="-127"/>
+                    <a:ea typeface="D2Coding" panose="020B0609020101020101" pitchFamily="49" charset="-127"/>
+                  </a:rPr>
+                  <a:t>, </a:t>
+                </a:r>
+                <a:r>
+                  <a:rPr lang="ko-KR" altLang="ko-KR" sz="1400" dirty="0" err="1">
+                    <a:latin typeface="D2Coding" panose="020B0609020101020101" pitchFamily="49" charset="-127"/>
+                    <a:ea typeface="D2Coding" panose="020B0609020101020101" pitchFamily="49" charset="-127"/>
+                  </a:rPr>
+                  <a:t>Qdrant</a:t>
+                </a:r>
+                <a:r>
+                  <a:rPr lang="ko-KR" altLang="ko-KR" sz="1400" dirty="0">
+                    <a:latin typeface="D2Coding" panose="020B0609020101020101" pitchFamily="49" charset="-127"/>
+                    <a:ea typeface="D2Coding" panose="020B0609020101020101" pitchFamily="49" charset="-127"/>
+                  </a:rPr>
+                  <a:t>, </a:t>
+                </a:r>
+                <a:r>
+                  <a:rPr lang="ko-KR" altLang="ko-KR" sz="1400" dirty="0" err="1">
+                    <a:latin typeface="D2Coding" panose="020B0609020101020101" pitchFamily="49" charset="-127"/>
+                    <a:ea typeface="D2Coding" panose="020B0609020101020101" pitchFamily="49" charset="-127"/>
+                  </a:rPr>
+                  <a:t>Chroma</a:t>
+                </a:r>
+                <a:r>
+                  <a:rPr lang="ko-KR" altLang="ko-KR" sz="1400" dirty="0">
+                    <a:latin typeface="D2Coding" panose="020B0609020101020101" pitchFamily="49" charset="-127"/>
+                    <a:ea typeface="D2Coding" panose="020B0609020101020101" pitchFamily="49" charset="-127"/>
+                  </a:rPr>
+                  <a:t> 등 대표적인 벡터 </a:t>
+                </a:r>
+                <a:r>
+                  <a:rPr lang="ko-KR" altLang="ko-KR" sz="1400" dirty="0" err="1">
+                    <a:latin typeface="D2Coding" panose="020B0609020101020101" pitchFamily="49" charset="-127"/>
+                    <a:ea typeface="D2Coding" panose="020B0609020101020101" pitchFamily="49" charset="-127"/>
+                  </a:rPr>
+                  <a:t>DB에서</a:t>
+                </a:r>
+                <a:r>
+                  <a:rPr lang="ko-KR" altLang="ko-KR" sz="1400" dirty="0">
+                    <a:latin typeface="D2Coding" panose="020B0609020101020101" pitchFamily="49" charset="-127"/>
+                    <a:ea typeface="D2Coding" panose="020B0609020101020101" pitchFamily="49" charset="-127"/>
+                  </a:rPr>
+                  <a:t> 인덱싱 알고리즘으로 채택</a:t>
+                </a:r>
+                <a:endParaRPr lang="ko-KR" altLang="en-US" sz="1400" dirty="0">
+                  <a:latin typeface="D2Coding" panose="020B0609020101020101" pitchFamily="49" charset="-127"/>
+                  <a:ea typeface="D2Coding" panose="020B0609020101020101" pitchFamily="49" charset="-127"/>
+                </a:endParaRPr>
+              </a:p>
+            </p:txBody>
+          </p:sp>
+        </mc:Choice>
+        <mc:Fallback>
+          <p:sp>
+            <p:nvSpPr>
+              <p:cNvPr id="10" name="TextBox 9">
+                <a:extLst>
+                  <a:ext uri="{FF2B5EF4-FFF2-40B4-BE49-F238E27FC236}">
+                    <a16:creationId xmlns:a16="http://schemas.microsoft.com/office/drawing/2014/main" id="{AB8C37FB-284E-EC98-BE38-02540B0599AA}"/>
+                  </a:ext>
+                </a:extLst>
+              </p:cNvPr>
+              <p:cNvSpPr txBox="1">
+                <a:spLocks noRot="1" noChangeAspect="1" noMove="1" noResize="1" noEditPoints="1" noAdjustHandles="1" noChangeArrowheads="1" noChangeShapeType="1" noTextEdit="1"/>
+              </p:cNvSpPr>
+              <p:nvPr/>
+            </p:nvSpPr>
+            <p:spPr>
+              <a:xfrm>
+                <a:off x="5160847" y="3920062"/>
+                <a:ext cx="6326909" cy="1767472"/>
+              </a:xfrm>
+              <a:prstGeom prst="rect">
+                <a:avLst/>
+              </a:prstGeom>
+              <a:blipFill>
+                <a:blip r:embed="rId3"/>
+                <a:stretch>
+                  <a:fillRect l="-770" b="-2055"/>
+                </a:stretch>
+              </a:blipFill>
+              <a:ln>
+                <a:solidFill>
+                  <a:schemeClr val="tx1"/>
+                </a:solidFill>
+              </a:ln>
+            </p:spPr>
+            <p:txBody>
+              <a:bodyPr/>
+              <a:lstStyle/>
+              <a:p>
+                <a:r>
+                  <a:rPr lang="ko-KR" altLang="en-US">
+                    <a:noFill/>
+                  </a:rPr>
+                  <a:t> </a:t>
+                </a:r>
+              </a:p>
+            </p:txBody>
+          </p:sp>
+        </mc:Fallback>
+      </mc:AlternateContent>
+      <p:sp>
+        <p:nvSpPr>
+          <p:cNvPr id="2" name="슬라이드 번호 개체 틀 3">
+            <a:extLst>
+              <a:ext uri="{FF2B5EF4-FFF2-40B4-BE49-F238E27FC236}">
+                <a16:creationId xmlns:a16="http://schemas.microsoft.com/office/drawing/2014/main" id="{2182948B-6D90-FF71-6DFB-D937760CF354}"/>
+              </a:ext>
+            </a:extLst>
+          </p:cNvPr>
+          <p:cNvSpPr txBox="1">
+            <a:spLocks/>
+          </p:cNvSpPr>
+          <p:nvPr/>
+        </p:nvSpPr>
+        <p:spPr>
+          <a:xfrm>
+            <a:off x="11162230" y="299420"/>
+            <a:ext cx="753545" cy="365125"/>
+          </a:xfrm>
+          <a:prstGeom prst="rect">
+            <a:avLst/>
+          </a:prstGeom>
+        </p:spPr>
+        <p:txBody>
+          <a:bodyPr vert="horz" lIns="91440" tIns="45720" rIns="91440" bIns="45720" rtlCol="0" anchor="ctr"/>
+          <a:lstStyle>
+            <a:defPPr rtl="0">
+              <a:defRPr lang="ko-KR"/>
+            </a:defPPr>
+            <a:lvl1pPr marL="0" algn="r" defTabSz="914400" rtl="0" eaLnBrk="1" latinLnBrk="0" hangingPunct="1">
+              <a:defRPr sz="1200" kern="1200" baseline="0">
+                <a:solidFill>
+                  <a:schemeClr val="tx1">
+                    <a:lumMod val="65000"/>
+                    <a:lumOff val="35000"/>
+                  </a:schemeClr>
+                </a:solidFill>
+                <a:latin typeface="맑은 고딕" panose="020B0503020000020004" pitchFamily="50" charset="-127"/>
+                <a:ea typeface="맑은 고딕" panose="020B0503020000020004" pitchFamily="50" charset="-127"/>
+                <a:cs typeface="+mn-cs"/>
+              </a:defRPr>
+            </a:lvl1pPr>
+            <a:lvl2pPr marL="457200" algn="l" defTabSz="914400" rtl="0" eaLnBrk="1" latinLnBrk="0" hangingPunct="1">
+              <a:defRPr sz="1800" kern="1200">
+                <a:solidFill>
+                  <a:schemeClr val="tx1"/>
+                </a:solidFill>
+                <a:latin typeface="+mn-lt"/>
+                <a:ea typeface="+mn-ea"/>
+                <a:cs typeface="+mn-cs"/>
+              </a:defRPr>
+            </a:lvl2pPr>
+            <a:lvl3pPr marL="914400" algn="l" defTabSz="914400" rtl="0" eaLnBrk="1" latinLnBrk="0" hangingPunct="1">
+              <a:defRPr sz="1800" kern="1200">
+                <a:solidFill>
+                  <a:schemeClr val="tx1"/>
+                </a:solidFill>
+                <a:latin typeface="+mn-lt"/>
+                <a:ea typeface="+mn-ea"/>
+                <a:cs typeface="+mn-cs"/>
+              </a:defRPr>
+            </a:lvl3pPr>
+            <a:lvl4pPr marL="1371600" algn="l" defTabSz="914400" rtl="0" eaLnBrk="1" latinLnBrk="0" hangingPunct="1">
+              <a:defRPr sz="1800" kern="1200">
+                <a:solidFill>
+                  <a:schemeClr val="tx1"/>
+                </a:solidFill>
+                <a:latin typeface="+mn-lt"/>
+                <a:ea typeface="+mn-ea"/>
+                <a:cs typeface="+mn-cs"/>
+              </a:defRPr>
+            </a:lvl4pPr>
+            <a:lvl5pPr marL="1828800" algn="l" defTabSz="914400" rtl="0" eaLnBrk="1" latinLnBrk="0" hangingPunct="1">
+              <a:defRPr sz="1800" kern="1200">
+                <a:solidFill>
+                  <a:schemeClr val="tx1"/>
+                </a:solidFill>
+                <a:latin typeface="+mn-lt"/>
+                <a:ea typeface="+mn-ea"/>
+                <a:cs typeface="+mn-cs"/>
+              </a:defRPr>
+            </a:lvl5pPr>
+            <a:lvl6pPr marL="2286000" algn="l" defTabSz="914400" rtl="0" eaLnBrk="1" latinLnBrk="0" hangingPunct="1">
+              <a:defRPr sz="1800" kern="1200">
+                <a:solidFill>
+                  <a:schemeClr val="tx1"/>
+                </a:solidFill>
+                <a:latin typeface="+mn-lt"/>
+                <a:ea typeface="+mn-ea"/>
+                <a:cs typeface="+mn-cs"/>
+              </a:defRPr>
+            </a:lvl6pPr>
+            <a:lvl7pPr marL="2743200" algn="l" defTabSz="914400" rtl="0" eaLnBrk="1" latinLnBrk="0" hangingPunct="1">
+              <a:defRPr sz="1800" kern="1200">
+                <a:solidFill>
+                  <a:schemeClr val="tx1"/>
+                </a:solidFill>
+                <a:latin typeface="+mn-lt"/>
+                <a:ea typeface="+mn-ea"/>
+                <a:cs typeface="+mn-cs"/>
+              </a:defRPr>
+            </a:lvl7pPr>
+            <a:lvl8pPr marL="3200400" algn="l" defTabSz="914400" rtl="0" eaLnBrk="1" latinLnBrk="0" hangingPunct="1">
+              <a:defRPr sz="1800" kern="1200">
+                <a:solidFill>
+                  <a:schemeClr val="tx1"/>
+                </a:solidFill>
+                <a:latin typeface="+mn-lt"/>
+                <a:ea typeface="+mn-ea"/>
+                <a:cs typeface="+mn-cs"/>
+              </a:defRPr>
+            </a:lvl8pPr>
+            <a:lvl9pPr marL="3657600" algn="l" defTabSz="914400" rtl="0" eaLnBrk="1" latinLnBrk="0" hangingPunct="1">
+              <a:defRPr sz="1800" kern="1200">
+                <a:solidFill>
+                  <a:schemeClr val="tx1"/>
+                </a:solidFill>
+                <a:latin typeface="+mn-lt"/>
+                <a:ea typeface="+mn-ea"/>
+                <a:cs typeface="+mn-cs"/>
+              </a:defRPr>
+            </a:lvl9pPr>
+          </a:lstStyle>
+          <a:p>
+            <a:fld id="{D57F1E4F-1CFF-5643-939E-217C01CDF565}" type="slidenum">
+              <a:rPr lang="en-US" b="1" smtClean="0"/>
+              <a:pPr/>
+              <a:t>7</a:t>
+            </a:fld>
+            <a:endParaRPr lang="en-US" b="1" dirty="0"/>
+          </a:p>
+        </p:txBody>
+      </p:sp>
+    </p:spTree>
+    <p:extLst>
+      <p:ext uri="{BB962C8B-B14F-4D97-AF65-F5344CB8AC3E}">
+        <p14:creationId xmlns:p14="http://schemas.microsoft.com/office/powerpoint/2010/main" val="852755999"/>
       </p:ext>
     </p:extLst>
   </p:cSld>

--- a/ppts/CHAPTER 3 RAG Part II_Chatting with Your Data.pptx
+++ b/ppts/CHAPTER 3 RAG Part II_Chatting with Your Data.pptx
@@ -7116,6 +7116,69 @@
           </a:p>
         </p:txBody>
       </p:sp>
+      <p:sp>
+        <p:nvSpPr>
+          <p:cNvPr id="4" name="TextBox 3">
+            <a:extLst>
+              <a:ext uri="{FF2B5EF4-FFF2-40B4-BE49-F238E27FC236}">
+                <a16:creationId xmlns:a16="http://schemas.microsoft.com/office/drawing/2014/main" id="{EC9EE47B-4C0F-10C6-57E2-C48AC3EFCAD3}"/>
+              </a:ext>
+            </a:extLst>
+          </p:cNvPr>
+          <p:cNvSpPr txBox="1"/>
+          <p:nvPr/>
+        </p:nvSpPr>
+        <p:spPr>
+          <a:xfrm>
+            <a:off x="6548582" y="3721973"/>
+            <a:ext cx="5163126" cy="338554"/>
+          </a:xfrm>
+          <a:prstGeom prst="rect">
+            <a:avLst/>
+          </a:prstGeom>
+          <a:solidFill>
+            <a:schemeClr val="tx1"/>
+          </a:solidFill>
+        </p:spPr>
+        <p:txBody>
+          <a:bodyPr wrap="square">
+            <a:spAutoFit/>
+          </a:bodyPr>
+          <a:lstStyle/>
+          <a:p>
+            <a:r>
+              <a:rPr lang="ko-KR" altLang="en-US" sz="1600" dirty="0">
+                <a:solidFill>
+                  <a:schemeClr val="bg1"/>
+                </a:solidFill>
+                <a:latin typeface="D2Coding" panose="020B0609020101020101" pitchFamily="49" charset="-127"/>
+                <a:ea typeface="D2Coding" panose="020B0609020101020101" pitchFamily="49" charset="-127"/>
+              </a:rPr>
+              <a:t>/CH3</a:t>
+            </a:r>
+            <a:r>
+              <a:rPr lang="en-US" altLang="ko-KR" sz="1600" dirty="0">
+                <a:solidFill>
+                  <a:schemeClr val="bg1"/>
+                </a:solidFill>
+                <a:latin typeface="D2Coding" panose="020B0609020101020101" pitchFamily="49" charset="-127"/>
+                <a:ea typeface="D2Coding" panose="020B0609020101020101" pitchFamily="49" charset="-127"/>
+              </a:rPr>
+              <a:t>2</a:t>
+            </a:r>
+            <a:r>
+              <a:rPr lang="ko-KR" altLang="en-US" sz="1600" dirty="0">
+                <a:solidFill>
+                  <a:schemeClr val="bg1"/>
+                </a:solidFill>
+                <a:latin typeface="D2Coding" panose="020B0609020101020101" pitchFamily="49" charset="-127"/>
+                <a:ea typeface="D2Coding" panose="020B0609020101020101" pitchFamily="49" charset="-127"/>
+              </a:rPr>
+              <a:t>_RAG_Part_II_Chatting_with_Your_Data.ipynb</a:t>
+            </a:r>
+          </a:p>
+        </p:txBody>
+      </p:sp>
     </p:spTree>
     <p:extLst>
       <p:ext uri="{BB962C8B-B14F-4D97-AF65-F5344CB8AC3E}">
@@ -9174,6 +9237,69 @@
               <a:t>19</a:t>
             </a:fld>
             <a:endParaRPr lang="en-US" b="1" dirty="0"/>
+          </a:p>
+        </p:txBody>
+      </p:sp>
+      <p:sp>
+        <p:nvSpPr>
+          <p:cNvPr id="6" name="TextBox 5">
+            <a:extLst>
+              <a:ext uri="{FF2B5EF4-FFF2-40B4-BE49-F238E27FC236}">
+                <a16:creationId xmlns:a16="http://schemas.microsoft.com/office/drawing/2014/main" id="{9E02B153-D25E-29DD-CA03-E552955447B9}"/>
+              </a:ext>
+            </a:extLst>
+          </p:cNvPr>
+          <p:cNvSpPr txBox="1"/>
+          <p:nvPr/>
+        </p:nvSpPr>
+        <p:spPr>
+          <a:xfrm>
+            <a:off x="6640946" y="5226923"/>
+            <a:ext cx="5163126" cy="338554"/>
+          </a:xfrm>
+          <a:prstGeom prst="rect">
+            <a:avLst/>
+          </a:prstGeom>
+          <a:solidFill>
+            <a:schemeClr val="tx1"/>
+          </a:solidFill>
+        </p:spPr>
+        <p:txBody>
+          <a:bodyPr wrap="square">
+            <a:spAutoFit/>
+          </a:bodyPr>
+          <a:lstStyle/>
+          <a:p>
+            <a:r>
+              <a:rPr lang="ko-KR" altLang="en-US" sz="1600" dirty="0">
+                <a:solidFill>
+                  <a:schemeClr val="bg1"/>
+                </a:solidFill>
+                <a:latin typeface="D2Coding" panose="020B0609020101020101" pitchFamily="49" charset="-127"/>
+                <a:ea typeface="D2Coding" panose="020B0609020101020101" pitchFamily="49" charset="-127"/>
+              </a:rPr>
+              <a:t>/CH3</a:t>
+            </a:r>
+            <a:r>
+              <a:rPr lang="en-US" altLang="ko-KR" sz="1600" dirty="0">
+                <a:solidFill>
+                  <a:schemeClr val="bg1"/>
+                </a:solidFill>
+                <a:latin typeface="D2Coding" panose="020B0609020101020101" pitchFamily="49" charset="-127"/>
+                <a:ea typeface="D2Coding" panose="020B0609020101020101" pitchFamily="49" charset="-127"/>
+              </a:rPr>
+              <a:t>3</a:t>
+            </a:r>
+            <a:r>
+              <a:rPr lang="ko-KR" altLang="en-US" sz="1600" dirty="0">
+                <a:solidFill>
+                  <a:schemeClr val="bg1"/>
+                </a:solidFill>
+                <a:latin typeface="D2Coding" panose="020B0609020101020101" pitchFamily="49" charset="-127"/>
+                <a:ea typeface="D2Coding" panose="020B0609020101020101" pitchFamily="49" charset="-127"/>
+              </a:rPr>
+              <a:t>_RAG_Part_II_Chatting_with_Your_Data.ipynb</a:t>
+            </a:r>
           </a:p>
         </p:txBody>
       </p:sp>
@@ -16645,6 +16771,69 @@
               <a:latin typeface="D2Coding" panose="020B0609020101020101" pitchFamily="49" charset="-127"/>
               <a:ea typeface="D2Coding" panose="020B0609020101020101" pitchFamily="49" charset="-127"/>
             </a:endParaRPr>
+          </a:p>
+        </p:txBody>
+      </p:sp>
+      <p:sp>
+        <p:nvSpPr>
+          <p:cNvPr id="4" name="TextBox 3">
+            <a:extLst>
+              <a:ext uri="{FF2B5EF4-FFF2-40B4-BE49-F238E27FC236}">
+                <a16:creationId xmlns:a16="http://schemas.microsoft.com/office/drawing/2014/main" id="{A0265AE8-254D-18B8-6B6B-D2D24C6F3F1F}"/>
+              </a:ext>
+            </a:extLst>
+          </p:cNvPr>
+          <p:cNvSpPr txBox="1"/>
+          <p:nvPr/>
+        </p:nvSpPr>
+        <p:spPr>
+          <a:xfrm>
+            <a:off x="6474691" y="1464548"/>
+            <a:ext cx="5163126" cy="338554"/>
+          </a:xfrm>
+          <a:prstGeom prst="rect">
+            <a:avLst/>
+          </a:prstGeom>
+          <a:solidFill>
+            <a:schemeClr val="tx1"/>
+          </a:solidFill>
+        </p:spPr>
+        <p:txBody>
+          <a:bodyPr wrap="square">
+            <a:spAutoFit/>
+          </a:bodyPr>
+          <a:lstStyle/>
+          <a:p>
+            <a:r>
+              <a:rPr lang="ko-KR" altLang="en-US" sz="1600" dirty="0">
+                <a:solidFill>
+                  <a:schemeClr val="bg1"/>
+                </a:solidFill>
+                <a:latin typeface="D2Coding" panose="020B0609020101020101" pitchFamily="49" charset="-127"/>
+                <a:ea typeface="D2Coding" panose="020B0609020101020101" pitchFamily="49" charset="-127"/>
+              </a:rPr>
+              <a:t>/CH3</a:t>
+            </a:r>
+            <a:r>
+              <a:rPr lang="en-US" altLang="ko-KR" sz="1600" dirty="0">
+                <a:solidFill>
+                  <a:schemeClr val="bg1"/>
+                </a:solidFill>
+                <a:latin typeface="D2Coding" panose="020B0609020101020101" pitchFamily="49" charset="-127"/>
+                <a:ea typeface="D2Coding" panose="020B0609020101020101" pitchFamily="49" charset="-127"/>
+              </a:rPr>
+              <a:t>1</a:t>
+            </a:r>
+            <a:r>
+              <a:rPr lang="ko-KR" altLang="en-US" sz="1600" dirty="0">
+                <a:solidFill>
+                  <a:schemeClr val="bg1"/>
+                </a:solidFill>
+                <a:latin typeface="D2Coding" panose="020B0609020101020101" pitchFamily="49" charset="-127"/>
+                <a:ea typeface="D2Coding" panose="020B0609020101020101" pitchFamily="49" charset="-127"/>
+              </a:rPr>
+              <a:t>_RAG_Part_II_Chatting_with_Your_Data.ipynb</a:t>
+            </a:r>
           </a:p>
         </p:txBody>
       </p:sp>
